--- a/OneMember-Merchant-Presentation-v3.pptx
+++ b/OneMember-Merchant-Presentation-v3.pptx
@@ -4,22 +4,25 @@
   <p:sldMasterIdLst>
     <p:sldMasterId id="2147483648" r:id="rId1"/>
   </p:sldMasterIdLst>
+  <p:notesMasterIdLst>
+    <p:notesMasterId r:id="rId15"/>
+  </p:notesMasterIdLst>
   <p:sldIdLst>
-    <p:sldId id="256" r:id="rId7"/>
-    <p:sldId id="257" r:id="rId9"/>
-    <p:sldId id="258" r:id="rId10"/>
-    <p:sldId id="259" r:id="rId11"/>
-    <p:sldId id="260" r:id="rId12"/>
-    <p:sldId id="261" r:id="rId13"/>
-    <p:sldId id="262" r:id="rId14"/>
-    <p:sldId id="263" r:id="rId15"/>
-    <p:sldId id="264" r:id="rId16"/>
-    <p:sldId id="265" r:id="rId17"/>
-    <p:sldId id="266" r:id="rId18"/>
-    <p:sldId id="267" r:id="rId19"/>
-    <p:sldId id="268" r:id="rId20"/>
+    <p:sldId id="256" r:id="rId2"/>
+    <p:sldId id="257" r:id="rId3"/>
+    <p:sldId id="258" r:id="rId4"/>
+    <p:sldId id="259" r:id="rId5"/>
+    <p:sldId id="260" r:id="rId6"/>
+    <p:sldId id="261" r:id="rId7"/>
+    <p:sldId id="262" r:id="rId8"/>
+    <p:sldId id="263" r:id="rId9"/>
+    <p:sldId id="264" r:id="rId10"/>
+    <p:sldId id="265" r:id="rId11"/>
+    <p:sldId id="266" r:id="rId12"/>
+    <p:sldId id="267" r:id="rId13"/>
+    <p:sldId id="268" r:id="rId14"/>
   </p:sldIdLst>
-  <p:sldSz cx="12191695" cy="6858000" type="screen4x3"/>
+  <p:sldSz cx="12192000" cy="6858000"/>
   <p:notesSz cx="6858000" cy="9144000"/>
   <p:defaultTextStyle>
     <a:defPPr>
@@ -116,11 +119,27 @@
       </a:defRPr>
     </a:lvl9pPr>
   </p:defaultTextStyle>
+  <p:extLst>
+    <p:ext uri="{EFAFB233-063F-42B5-8137-9DF3F51BA10A}">
+      <p15:sldGuideLst xmlns:p15="http://schemas.microsoft.com/office/powerpoint/2012/main">
+        <p15:guide id="1" orient="horz" pos="2160">
+          <p15:clr>
+            <a:srgbClr val="A4A3A4"/>
+          </p15:clr>
+        </p15:guide>
+        <p15:guide id="2" pos="2880">
+          <p15:clr>
+            <a:srgbClr val="A4A3A4"/>
+          </p15:clr>
+        </p15:guide>
+      </p15:sldGuideLst>
+    </p:ext>
+  </p:extLst>
 </p:presentation>
 </file>
 
 <file path=ppt/notesMasters/notesMaster1.xml><?xml version="1.0" encoding="utf-8"?>
-<p:notesMaster xmlns:a="http://schemas.openxmlformats.org/drawingml/2006/main" xmlns:p="http://schemas.openxmlformats.org/presentationml/2006/main" xmlns:r="http://schemas.openxmlformats.org/officeDocument/2006/relationships">
+<p:notesMaster xmlns:a="http://schemas.openxmlformats.org/drawingml/2006/main" xmlns:r="http://schemas.openxmlformats.org/officeDocument/2006/relationships" xmlns:p="http://schemas.openxmlformats.org/presentationml/2006/main">
   <p:cSld>
     <p:bg>
       <p:bgRef idx="1001">
@@ -141,241 +160,16 @@
           <a:chExt cx="0" cy="0"/>
         </a:xfrm>
       </p:grpSpPr>
-      <p:sp>
-        <p:nvSpPr>
-          <p:cNvPr id="2" name="Header Placeholder 1"/>
-          <p:cNvSpPr>
-            <a:spLocks noGrp="1"/>
-          </p:cNvSpPr>
-          <p:nvPr>
-            <p:ph type="hdr" sz="quarter"/>
-          </p:nvPr>
-        </p:nvSpPr>
-        <p:spPr>
-          <a:xfrm>
-            <a:off x="0" y="0"/>
-            <a:ext cx="2971800" cy="457200"/>
-          </a:xfrm>
-          <a:prstGeom prst="rect">
-            <a:avLst/>
-          </a:prstGeom>
-        </p:spPr>
-        <p:txBody>
-          <a:bodyPr vert="horz" lIns="91440" tIns="45720" rIns="91440" bIns="45720" rtlCol="0"/>
-          <a:lstStyle>
-            <a:lvl1pPr algn="l">
-              <a:defRPr sz="1200"/>
-            </a:lvl1pPr>
-          </a:lstStyle>
-          <a:p>
-            <a:endParaRPr lang="en-US"/>
-          </a:p>
-        </p:txBody>
-      </p:sp>
-      <p:sp>
-        <p:nvSpPr>
-          <p:cNvPr id="3" name="Date Placeholder 2"/>
-          <p:cNvSpPr>
-            <a:spLocks noGrp="1"/>
-          </p:cNvSpPr>
-          <p:nvPr>
-            <p:ph type="dt" idx="1"/>
-          </p:nvPr>
-        </p:nvSpPr>
-        <p:spPr>
-          <a:xfrm>
-            <a:off x="3884613" y="0"/>
-            <a:ext cx="2971800" cy="457200"/>
-          </a:xfrm>
-          <a:prstGeom prst="rect">
-            <a:avLst/>
-          </a:prstGeom>
-        </p:spPr>
-        <p:txBody>
-          <a:bodyPr vert="horz" lIns="91440" tIns="45720" rIns="91440" bIns="45720" rtlCol="0"/>
-          <a:lstStyle>
-            <a:lvl1pPr algn="r">
-              <a:defRPr sz="1200"/>
-            </a:lvl1pPr>
-          </a:lstStyle>
-          <a:p>
-            <a:fld id="{0F89C1C7-3DCD-1040-A9CF-14679D8B5DDD}" type="datetimeFigureOut">
-              <a:rPr lang="en-US" smtClean="0"/>
-              <a:t>10/17/16</a:t>
-            </a:fld>
-            <a:endParaRPr lang="en-US"/>
-          </a:p>
-        </p:txBody>
-      </p:sp>
-      <p:sp>
-        <p:nvSpPr>
-          <p:cNvPr id="4" name="Slide Image Placeholder 3"/>
-          <p:cNvSpPr>
-            <a:spLocks noGrp="1" noRot="1" noChangeAspect="1"/>
-          </p:cNvSpPr>
-          <p:nvPr>
-            <p:ph type="sldImg" idx="2"/>
-          </p:nvPr>
-        </p:nvSpPr>
-        <p:spPr>
-          <a:xfrm>
-            <a:off x="1143000" y="685800"/>
-            <a:ext cx="4572000" cy="3429000"/>
-          </a:xfrm>
-          <a:prstGeom prst="rect">
-            <a:avLst/>
-          </a:prstGeom>
-          <a:noFill/>
-          <a:ln w="12700">
-            <a:solidFill>
-              <a:prstClr val="black"/>
-            </a:solidFill>
-          </a:ln>
-        </p:spPr>
-        <p:txBody>
-          <a:bodyPr vert="horz" lIns="91440" tIns="45720" rIns="91440" bIns="45720" rtlCol="0" anchor="ctr"/>
-          <a:lstStyle/>
-          <a:p>
-            <a:endParaRPr lang="en-US"/>
-          </a:p>
-        </p:txBody>
-      </p:sp>
-      <p:sp>
-        <p:nvSpPr>
-          <p:cNvPr id="5" name="Notes Placeholder 4"/>
-          <p:cNvSpPr>
-            <a:spLocks noGrp="1"/>
-          </p:cNvSpPr>
-          <p:nvPr>
-            <p:ph type="body" sz="quarter" idx="3"/>
-          </p:nvPr>
-        </p:nvSpPr>
-        <p:spPr>
-          <a:xfrm>
-            <a:off x="685800" y="4343400"/>
-            <a:ext cx="5486400" cy="4114800"/>
-          </a:xfrm>
-          <a:prstGeom prst="rect">
-            <a:avLst/>
-          </a:prstGeom>
-        </p:spPr>
-        <p:txBody>
-          <a:bodyPr vert="horz" lIns="91440" tIns="45720" rIns="91440" bIns="45720" rtlCol="0"/>
-          <a:lstStyle/>
-          <a:p>
-            <a:pPr lvl="0"/>
-            <a:r>
-              <a:rPr lang="en-US" smtClean="0"/>
-              <a:t>Click to edit Master text styles</a:t>
-            </a:r>
-          </a:p>
-          <a:p>
-            <a:pPr lvl="1"/>
-            <a:r>
-              <a:rPr lang="en-US" smtClean="0"/>
-              <a:t>Second level</a:t>
-            </a:r>
-          </a:p>
-          <a:p>
-            <a:pPr lvl="2"/>
-            <a:r>
-              <a:rPr lang="en-US" smtClean="0"/>
-              <a:t>Third level</a:t>
-            </a:r>
-          </a:p>
-          <a:p>
-            <a:pPr lvl="3"/>
-            <a:r>
-              <a:rPr lang="en-US" smtClean="0"/>
-              <a:t>Fourth level</a:t>
-            </a:r>
-          </a:p>
-          <a:p>
-            <a:pPr lvl="4"/>
-            <a:r>
-              <a:rPr lang="en-US" smtClean="0"/>
-              <a:t>Fifth level</a:t>
-            </a:r>
-            <a:endParaRPr lang="en-US"/>
-          </a:p>
-        </p:txBody>
-      </p:sp>
-      <p:sp>
-        <p:nvSpPr>
-          <p:cNvPr id="6" name="Footer Placeholder 5"/>
-          <p:cNvSpPr>
-            <a:spLocks noGrp="1"/>
-          </p:cNvSpPr>
-          <p:nvPr>
-            <p:ph type="ftr" sz="quarter" idx="4"/>
-          </p:nvPr>
-        </p:nvSpPr>
-        <p:spPr>
-          <a:xfrm>
-            <a:off x="0" y="8685213"/>
-            <a:ext cx="2971800" cy="457200"/>
-          </a:xfrm>
-          <a:prstGeom prst="rect">
-            <a:avLst/>
-          </a:prstGeom>
-        </p:spPr>
-        <p:txBody>
-          <a:bodyPr vert="horz" lIns="91440" tIns="45720" rIns="91440" bIns="45720" rtlCol="0" anchor="b"/>
-          <a:lstStyle>
-            <a:lvl1pPr algn="l">
-              <a:defRPr sz="1200"/>
-            </a:lvl1pPr>
-          </a:lstStyle>
-          <a:p>
-            <a:endParaRPr lang="en-US"/>
-          </a:p>
-        </p:txBody>
-      </p:sp>
-      <p:sp>
-        <p:nvSpPr>
-          <p:cNvPr id="7" name="Slide Number Placeholder 6"/>
-          <p:cNvSpPr>
-            <a:spLocks noGrp="1"/>
-          </p:cNvSpPr>
-          <p:nvPr>
-            <p:ph type="sldNum" sz="quarter" idx="5"/>
-          </p:nvPr>
-        </p:nvSpPr>
-        <p:spPr>
-          <a:xfrm>
-            <a:off x="3884613" y="8685213"/>
-            <a:ext cx="2971800" cy="457200"/>
-          </a:xfrm>
-          <a:prstGeom prst="rect">
-            <a:avLst/>
-          </a:prstGeom>
-        </p:spPr>
-        <p:txBody>
-          <a:bodyPr vert="horz" lIns="91440" tIns="45720" rIns="91440" bIns="45720" rtlCol="0" anchor="b"/>
-          <a:lstStyle>
-            <a:lvl1pPr algn="r">
-              <a:defRPr sz="1200"/>
-            </a:lvl1pPr>
-          </a:lstStyle>
-          <a:p>
-            <a:fld id="{BB5E49A5-4136-284D-997B-48E1D791AD67}" type="slidenum">
-              <a:rPr lang="en-US" smtClean="0"/>
-              <a:t>‹#›</a:t>
-            </a:fld>
-            <a:endParaRPr lang="en-US"/>
-          </a:p>
-        </p:txBody>
-      </p:sp>
     </p:spTree>
     <p:extLst>
       <p:ext uri="{BB962C8B-B14F-4D97-AF65-F5344CB8AC3E}">
-        <p14:creationId xmlns:p14="http://schemas.microsoft.com/office/powerpoint/2010/main" val="2623252185"/>
+        <p14:creationId xmlns:p14="http://schemas.microsoft.com/office/powerpoint/2010/main" val="2362653538"/>
       </p:ext>
     </p:extLst>
   </p:cSld>
   <p:clrMap bg1="lt1" tx1="dk1" bg2="lt2" tx2="dk2" accent1="accent1" accent2="accent2" accent3="accent3" accent4="accent4" accent5="accent5" accent6="accent6" hlink="hlink" folHlink="folHlink"/>
   <p:notesStyle>
-    <a:lvl1pPr marL="0" algn="l" defTabSz="457200" rtl="0" eaLnBrk="1" latinLnBrk="0" hangingPunct="1">
+    <a:lvl1pPr marL="0" algn="l" defTabSz="914400" rtl="0" eaLnBrk="1" latinLnBrk="0" hangingPunct="1">
       <a:defRPr sz="1200" kern="1200">
         <a:solidFill>
           <a:schemeClr val="tx1"/>
@@ -385,7 +179,7 @@
         <a:cs typeface="+mn-cs"/>
       </a:defRPr>
     </a:lvl1pPr>
-    <a:lvl2pPr marL="457200" algn="l" defTabSz="457200" rtl="0" eaLnBrk="1" latinLnBrk="0" hangingPunct="1">
+    <a:lvl2pPr marL="457200" algn="l" defTabSz="914400" rtl="0" eaLnBrk="1" latinLnBrk="0" hangingPunct="1">
       <a:defRPr sz="1200" kern="1200">
         <a:solidFill>
           <a:schemeClr val="tx1"/>
@@ -395,7 +189,7 @@
         <a:cs typeface="+mn-cs"/>
       </a:defRPr>
     </a:lvl2pPr>
-    <a:lvl3pPr marL="914400" algn="l" defTabSz="457200" rtl="0" eaLnBrk="1" latinLnBrk="0" hangingPunct="1">
+    <a:lvl3pPr marL="914400" algn="l" defTabSz="914400" rtl="0" eaLnBrk="1" latinLnBrk="0" hangingPunct="1">
       <a:defRPr sz="1200" kern="1200">
         <a:solidFill>
           <a:schemeClr val="tx1"/>
@@ -405,7 +199,7 @@
         <a:cs typeface="+mn-cs"/>
       </a:defRPr>
     </a:lvl3pPr>
-    <a:lvl4pPr marL="1371600" algn="l" defTabSz="457200" rtl="0" eaLnBrk="1" latinLnBrk="0" hangingPunct="1">
+    <a:lvl4pPr marL="1371600" algn="l" defTabSz="914400" rtl="0" eaLnBrk="1" latinLnBrk="0" hangingPunct="1">
       <a:defRPr sz="1200" kern="1200">
         <a:solidFill>
           <a:schemeClr val="tx1"/>
@@ -415,7 +209,7 @@
         <a:cs typeface="+mn-cs"/>
       </a:defRPr>
     </a:lvl4pPr>
-    <a:lvl5pPr marL="1828800" algn="l" defTabSz="457200" rtl="0" eaLnBrk="1" latinLnBrk="0" hangingPunct="1">
+    <a:lvl5pPr marL="1828800" algn="l" defTabSz="914400" rtl="0" eaLnBrk="1" latinLnBrk="0" hangingPunct="1">
       <a:defRPr sz="1200" kern="1200">
         <a:solidFill>
           <a:schemeClr val="tx1"/>
@@ -425,7 +219,7 @@
         <a:cs typeface="+mn-cs"/>
       </a:defRPr>
     </a:lvl5pPr>
-    <a:lvl6pPr marL="2286000" algn="l" defTabSz="457200" rtl="0" eaLnBrk="1" latinLnBrk="0" hangingPunct="1">
+    <a:lvl6pPr marL="2286000" algn="l" defTabSz="914400" rtl="0" eaLnBrk="1" latinLnBrk="0" hangingPunct="1">
       <a:defRPr sz="1200" kern="1200">
         <a:solidFill>
           <a:schemeClr val="tx1"/>
@@ -435,7 +229,7 @@
         <a:cs typeface="+mn-cs"/>
       </a:defRPr>
     </a:lvl6pPr>
-    <a:lvl7pPr marL="2743200" algn="l" defTabSz="457200" rtl="0" eaLnBrk="1" latinLnBrk="0" hangingPunct="1">
+    <a:lvl7pPr marL="2743200" algn="l" defTabSz="914400" rtl="0" eaLnBrk="1" latinLnBrk="0" hangingPunct="1">
       <a:defRPr sz="1200" kern="1200">
         <a:solidFill>
           <a:schemeClr val="tx1"/>
@@ -445,7 +239,7 @@
         <a:cs typeface="+mn-cs"/>
       </a:defRPr>
     </a:lvl7pPr>
-    <a:lvl8pPr marL="3200400" algn="l" defTabSz="457200" rtl="0" eaLnBrk="1" latinLnBrk="0" hangingPunct="1">
+    <a:lvl8pPr marL="3200400" algn="l" defTabSz="914400" rtl="0" eaLnBrk="1" latinLnBrk="0" hangingPunct="1">
       <a:defRPr sz="1200" kern="1200">
         <a:solidFill>
           <a:schemeClr val="tx1"/>
@@ -455,7 +249,7 @@
         <a:cs typeface="+mn-cs"/>
       </a:defRPr>
     </a:lvl8pPr>
-    <a:lvl9pPr marL="3657600" algn="l" defTabSz="457200" rtl="0" eaLnBrk="1" latinLnBrk="0" hangingPunct="1">
+    <a:lvl9pPr marL="3657600" algn="l" defTabSz="914400" rtl="0" eaLnBrk="1" latinLnBrk="0" hangingPunct="1">
       <a:defRPr sz="1200" kern="1200">
         <a:solidFill>
           <a:schemeClr val="tx1"/>
@@ -470,7 +264,7 @@
 </file>
 
 <file path=ppt/notesSlides/notesSlide1.xml><?xml version="1.0" encoding="utf-8"?>
-<p:notes xmlns:a="http://schemas.openxmlformats.org/drawingml/2006/main" xmlns:p="http://schemas.openxmlformats.org/presentationml/2006/main" xmlns:r="http://schemas.openxmlformats.org/officeDocument/2006/relationships">
+<p:notes xmlns:a="http://schemas.openxmlformats.org/drawingml/2006/main" xmlns:r="http://schemas.openxmlformats.org/officeDocument/2006/relationships" xmlns:p="http://schemas.openxmlformats.org/presentationml/2006/main">
   <p:cSld>
     <p:spTree>
       <p:nvGrpSpPr>
@@ -490,7 +284,7 @@
         <p:nvSpPr>
           <p:cNvPr id="2" name="Slide Image Placeholder 1"/>
           <p:cNvSpPr>
-            <a:spLocks noGrp="1"/>
+            <a:spLocks noGrp="1" noRot="1" noChangeAspect="1"/>
           </p:cNvSpPr>
           <p:nvPr>
             <p:ph type="sldImg" idx="2"/>
@@ -505,7 +299,7 @@
             <a:spLocks noGrp="1"/>
           </p:cNvSpPr>
           <p:nvPr>
-            <p:ph type="body" idx="3" sz="quarter"/>
+            <p:ph type="body" sz="quarter" idx="3"/>
           </p:nvPr>
         </p:nvSpPr>
         <p:spPr/>
@@ -517,25 +311,33 @@
               <a:t>SLIDE 1 — THE HOOK (1 min)</a:t>
             </a:r>
           </a:p>
-          <a:p/>
+          <a:p>
+            <a:endParaRPr/>
+          </a:p>
           <a:p>
             <a:r>
               <a:t>Do not open with "let me tell you about OneMember." Open with silence and let them read the slide.</a:t>
             </a:r>
           </a:p>
-          <a:p/>
+          <a:p>
+            <a:endParaRPr/>
+          </a:p>
           <a:p>
             <a:r>
               <a:t>Then say: "Every week, customers walk through your door, have a great experience — and never come back. Not because they didn't enjoy it. Because you gave them no reason to remember you."</a:t>
             </a:r>
           </a:p>
-          <a:p/>
+          <a:p>
+            <a:endParaRPr/>
+          </a:p>
           <a:p>
             <a:r>
               <a:t>Pause. Let that land.</a:t>
             </a:r>
           </a:p>
-          <a:p/>
+          <a:p>
+            <a:endParaRPr/>
+          </a:p>
           <a:p>
             <a:r>
               <a:t>Then: "Today I want to show you exactly how much that's costing you — and how to fix it in 10 minutes."</a:t>
@@ -550,7 +352,7 @@
             <a:spLocks noGrp="1"/>
           </p:cNvSpPr>
           <p:nvPr>
-            <p:ph type="sldNum" idx="5" sz="quarter"/>
+            <p:ph type="sldNum" sz="quarter" idx="5"/>
           </p:nvPr>
         </p:nvSpPr>
         <p:spPr/>
@@ -564,7 +366,7 @@
 </file>
 
 <file path=ppt/notesSlides/notesSlide10.xml><?xml version="1.0" encoding="utf-8"?>
-<p:notes xmlns:a="http://schemas.openxmlformats.org/drawingml/2006/main" xmlns:p="http://schemas.openxmlformats.org/presentationml/2006/main" xmlns:r="http://schemas.openxmlformats.org/officeDocument/2006/relationships">
+<p:notes xmlns:a="http://schemas.openxmlformats.org/drawingml/2006/main" xmlns:r="http://schemas.openxmlformats.org/officeDocument/2006/relationships" xmlns:p="http://schemas.openxmlformats.org/presentationml/2006/main">
   <p:cSld>
     <p:spTree>
       <p:nvGrpSpPr>
@@ -584,7 +386,7 @@
         <p:nvSpPr>
           <p:cNvPr id="2" name="Slide Image Placeholder 1"/>
           <p:cNvSpPr>
-            <a:spLocks noGrp="1"/>
+            <a:spLocks noGrp="1" noRot="1" noChangeAspect="1"/>
           </p:cNvSpPr>
           <p:nvPr>
             <p:ph type="sldImg" idx="2"/>
@@ -599,7 +401,7 @@
             <a:spLocks noGrp="1"/>
           </p:cNvSpPr>
           <p:nvPr>
-            <p:ph type="body" idx="3" sz="quarter"/>
+            <p:ph type="body" sz="quarter" idx="3"/>
           </p:nvPr>
         </p:nvSpPr>
         <p:spPr/>
@@ -611,25 +413,33 @@
               <a:t>SLIDE 10 — TRUST &amp; PRIVACY (1 min)</a:t>
             </a:r>
           </a:p>
-          <a:p/>
+          <a:p>
+            <a:endParaRPr/>
+          </a:p>
           <a:p>
             <a:r>
               <a:t>Some merchants will ask about data privacy unprompted. Many won't — but their customers might.</a:t>
             </a:r>
           </a:p>
-          <a:p/>
+          <a:p>
+            <a:endParaRPr/>
+          </a:p>
           <a:p>
             <a:r>
               <a:t>Say: "We take PDPA seriously because your customers do. A loyalty programme only works if customers trust it. We've built compliance in from day one — not as an afterthought."</a:t>
             </a:r>
           </a:p>
-          <a:p/>
+          <a:p>
+            <a:endParaRPr/>
+          </a:p>
           <a:p>
             <a:r>
               <a:t>Key message: You own your data. We are a tool. Not a data broker.</a:t>
             </a:r>
           </a:p>
-          <a:p/>
+          <a:p>
+            <a:endParaRPr/>
+          </a:p>
           <a:p>
             <a:r>
               <a:t>If the merchant has a DPO or legal contact, offer to send a Data Processing Agreement.</a:t>
@@ -644,7 +454,7 @@
             <a:spLocks noGrp="1"/>
           </p:cNvSpPr>
           <p:nvPr>
-            <p:ph type="sldNum" idx="5" sz="quarter"/>
+            <p:ph type="sldNum" sz="quarter" idx="5"/>
           </p:nvPr>
         </p:nvSpPr>
         <p:spPr/>
@@ -658,7 +468,7 @@
 </file>
 
 <file path=ppt/notesSlides/notesSlide11.xml><?xml version="1.0" encoding="utf-8"?>
-<p:notes xmlns:a="http://schemas.openxmlformats.org/drawingml/2006/main" xmlns:p="http://schemas.openxmlformats.org/presentationml/2006/main" xmlns:r="http://schemas.openxmlformats.org/officeDocument/2006/relationships">
+<p:notes xmlns:a="http://schemas.openxmlformats.org/drawingml/2006/main" xmlns:r="http://schemas.openxmlformats.org/officeDocument/2006/relationships" xmlns:p="http://schemas.openxmlformats.org/presentationml/2006/main">
   <p:cSld>
     <p:spTree>
       <p:nvGrpSpPr>
@@ -678,7 +488,7 @@
         <p:nvSpPr>
           <p:cNvPr id="2" name="Slide Image Placeholder 1"/>
           <p:cNvSpPr>
-            <a:spLocks noGrp="1"/>
+            <a:spLocks noGrp="1" noRot="1" noChangeAspect="1"/>
           </p:cNvSpPr>
           <p:nvPr>
             <p:ph type="sldImg" idx="2"/>
@@ -693,7 +503,7 @@
             <a:spLocks noGrp="1"/>
           </p:cNvSpPr>
           <p:nvPr>
-            <p:ph type="body" idx="3" sz="quarter"/>
+            <p:ph type="body" sz="quarter" idx="3"/>
           </p:nvPr>
         </p:nvSpPr>
         <p:spPr/>
@@ -705,19 +515,25 @@
               <a:t>SLIDE 11 — URGENCY (1 min)</a:t>
             </a:r>
           </a:p>
-          <a:p/>
+          <a:p>
+            <a:endParaRPr/>
+          </a:p>
           <a:p>
             <a:r>
               <a:t>Don't be pushy. Let the logic create urgency.</a:t>
             </a:r>
           </a:p>
-          <a:p/>
+          <a:p>
+            <a:endParaRPr/>
+          </a:p>
           <a:p>
             <a:r>
               <a:t>"I'm not here to pressure you. But I want to be honest: the merchants who build their member database first own the loyalty advantage in their area. Once a customer is loyal to a competitor, it's very hard to win them back."</a:t>
             </a:r>
           </a:p>
-          <a:p/>
+          <a:p>
+            <a:endParaRPr/>
+          </a:p>
           <a:p>
             <a:r>
               <a:t>Then: "Every week you wait is a week of data you don't have."</a:t>
@@ -732,7 +548,7 @@
             <a:spLocks noGrp="1"/>
           </p:cNvSpPr>
           <p:nvPr>
-            <p:ph type="sldNum" idx="5" sz="quarter"/>
+            <p:ph type="sldNum" sz="quarter" idx="5"/>
           </p:nvPr>
         </p:nvSpPr>
         <p:spPr/>
@@ -746,7 +562,7 @@
 </file>
 
 <file path=ppt/notesSlides/notesSlide12.xml><?xml version="1.0" encoding="utf-8"?>
-<p:notes xmlns:a="http://schemas.openxmlformats.org/drawingml/2006/main" xmlns:p="http://schemas.openxmlformats.org/presentationml/2006/main" xmlns:r="http://schemas.openxmlformats.org/officeDocument/2006/relationships">
+<p:notes xmlns:a="http://schemas.openxmlformats.org/drawingml/2006/main" xmlns:r="http://schemas.openxmlformats.org/officeDocument/2006/relationships" xmlns:p="http://schemas.openxmlformats.org/presentationml/2006/main">
   <p:cSld>
     <p:spTree>
       <p:nvGrpSpPr>
@@ -766,7 +582,7 @@
         <p:nvSpPr>
           <p:cNvPr id="2" name="Slide Image Placeholder 1"/>
           <p:cNvSpPr>
-            <a:spLocks noGrp="1"/>
+            <a:spLocks noGrp="1" noRot="1" noChangeAspect="1"/>
           </p:cNvSpPr>
           <p:nvPr>
             <p:ph type="sldImg" idx="2"/>
@@ -781,7 +597,7 @@
             <a:spLocks noGrp="1"/>
           </p:cNvSpPr>
           <p:nvPr>
-            <p:ph type="body" idx="3" sz="quarter"/>
+            <p:ph type="body" sz="quarter" idx="3"/>
           </p:nvPr>
         </p:nvSpPr>
         <p:spPr/>
@@ -793,25 +609,33 @@
               <a:t>SLIDE 12 — RISK REVERSAL (1 min)</a:t>
             </a:r>
           </a:p>
-          <a:p/>
+          <a:p>
+            <a:endParaRPr/>
+          </a:p>
           <a:p>
             <a:r>
               <a:t>Remove every possible objection before it's raised.</a:t>
             </a:r>
           </a:p>
-          <a:p/>
+          <a:p>
+            <a:endParaRPr/>
+          </a:p>
           <a:p>
             <a:r>
               <a:t>Note: If the ฿1,990 pricing needs to be updated, do so before the meeting.</a:t>
             </a:r>
           </a:p>
-          <a:p/>
+          <a:p>
+            <a:endParaRPr/>
+          </a:p>
           <a:p>
             <a:r>
               <a:t>"You have nothing to lose. No contract. No setup fee. If it doesn't work, you cancel and owe nothing. But — and I say this as someone who has seen this work for a lot of businesses — it works."</a:t>
             </a:r>
           </a:p>
-          <a:p/>
+          <a:p>
+            <a:endParaRPr/>
+          </a:p>
           <a:p>
             <a:r>
               <a:t>The "30-day guarantee" is a powerful closer. Lead with it if you sense hesitation.</a:t>
@@ -826,7 +650,7 @@
             <a:spLocks noGrp="1"/>
           </p:cNvSpPr>
           <p:nvPr>
-            <p:ph type="sldNum" idx="5" sz="quarter"/>
+            <p:ph type="sldNum" sz="quarter" idx="5"/>
           </p:nvPr>
         </p:nvSpPr>
         <p:spPr/>
@@ -840,7 +664,7 @@
 </file>
 
 <file path=ppt/notesSlides/notesSlide13.xml><?xml version="1.0" encoding="utf-8"?>
-<p:notes xmlns:a="http://schemas.openxmlformats.org/drawingml/2006/main" xmlns:p="http://schemas.openxmlformats.org/presentationml/2006/main" xmlns:r="http://schemas.openxmlformats.org/officeDocument/2006/relationships">
+<p:notes xmlns:a="http://schemas.openxmlformats.org/drawingml/2006/main" xmlns:r="http://schemas.openxmlformats.org/officeDocument/2006/relationships" xmlns:p="http://schemas.openxmlformats.org/presentationml/2006/main">
   <p:cSld>
     <p:spTree>
       <p:nvGrpSpPr>
@@ -860,7 +684,7 @@
         <p:nvSpPr>
           <p:cNvPr id="2" name="Slide Image Placeholder 1"/>
           <p:cNvSpPr>
-            <a:spLocks noGrp="1"/>
+            <a:spLocks noGrp="1" noRot="1" noChangeAspect="1"/>
           </p:cNvSpPr>
           <p:nvPr>
             <p:ph type="sldImg" idx="2"/>
@@ -875,7 +699,7 @@
             <a:spLocks noGrp="1"/>
           </p:cNvSpPr>
           <p:nvPr>
-            <p:ph type="body" idx="3" sz="quarter"/>
+            <p:ph type="body" sz="quarter" idx="3"/>
           </p:nvPr>
         </p:nvSpPr>
         <p:spPr/>
@@ -887,19 +711,25 @@
               <a:t>SLIDE 13 — CALL TO ACTION (1 min)</a:t>
             </a:r>
           </a:p>
-          <a:p/>
+          <a:p>
+            <a:endParaRPr/>
+          </a:p>
           <a:p>
             <a:r>
               <a:t>The goal of this slide is a single action: open the registration screen together.</a:t>
             </a:r>
           </a:p>
-          <a:p/>
+          <a:p>
+            <a:endParaRPr/>
+          </a:p>
           <a:p>
             <a:r>
               <a:t>Do not leave without doing Step 1 together. Registration takes 5 minutes and means the merchant has skin in the game.</a:t>
             </a:r>
           </a:p>
-          <a:p/>
+          <a:p>
+            <a:endParaRPr/>
+          </a:p>
           <a:p>
             <a:r>
               <a:t>If they won't register today:</a:t>
@@ -920,7 +750,9 @@
               <a:t>• Leave the Merchant FAQ and Objection Handling Guide</a:t>
             </a:r>
           </a:p>
-          <a:p/>
+          <a:p>
+            <a:endParaRPr/>
+          </a:p>
           <a:p>
             <a:r>
               <a:t>Never leave with "I'll think about it" as the outcome. Always leave with a date.</a:t>
@@ -935,7 +767,7 @@
             <a:spLocks noGrp="1"/>
           </p:cNvSpPr>
           <p:nvPr>
-            <p:ph type="sldNum" idx="5" sz="quarter"/>
+            <p:ph type="sldNum" sz="quarter" idx="5"/>
           </p:nvPr>
         </p:nvSpPr>
         <p:spPr/>
@@ -949,7 +781,7 @@
 </file>
 
 <file path=ppt/notesSlides/notesSlide2.xml><?xml version="1.0" encoding="utf-8"?>
-<p:notes xmlns:a="http://schemas.openxmlformats.org/drawingml/2006/main" xmlns:p="http://schemas.openxmlformats.org/presentationml/2006/main" xmlns:r="http://schemas.openxmlformats.org/officeDocument/2006/relationships">
+<p:notes xmlns:a="http://schemas.openxmlformats.org/drawingml/2006/main" xmlns:r="http://schemas.openxmlformats.org/officeDocument/2006/relationships" xmlns:p="http://schemas.openxmlformats.org/presentationml/2006/main">
   <p:cSld>
     <p:spTree>
       <p:nvGrpSpPr>
@@ -969,7 +801,7 @@
         <p:nvSpPr>
           <p:cNvPr id="2" name="Slide Image Placeholder 1"/>
           <p:cNvSpPr>
-            <a:spLocks noGrp="1"/>
+            <a:spLocks noGrp="1" noRot="1" noChangeAspect="1"/>
           </p:cNvSpPr>
           <p:nvPr>
             <p:ph type="sldImg" idx="2"/>
@@ -984,7 +816,7 @@
             <a:spLocks noGrp="1"/>
           </p:cNvSpPr>
           <p:nvPr>
-            <p:ph type="body" idx="3" sz="quarter"/>
+            <p:ph type="body" sz="quarter" idx="3"/>
           </p:nvPr>
         </p:nvSpPr>
         <p:spPr/>
@@ -996,19 +828,25 @@
               <a:t>SLIDE 2 — THE REALITY (1.5 min)</a:t>
             </a:r>
           </a:p>
-          <a:p/>
+          <a:p>
+            <a:endParaRPr/>
+          </a:p>
           <a:p>
             <a:r>
               <a:t>Present each stat slowly. After each one, ask: "Does that surprise you?"</a:t>
             </a:r>
           </a:p>
-          <a:p/>
+          <a:p>
+            <a:endParaRPr/>
+          </a:p>
           <a:p>
             <a:r>
               <a:t>The third stat — ฿0 — is the most devastating. Most merchants know customer X is their regular, but have no systematic record, no contact details, no way to reach them if they disappear.</a:t>
             </a:r>
           </a:p>
-          <a:p/>
+          <a:p>
+            <a:endParaRPr/>
+          </a:p>
           <a:p>
             <a:r>
               <a:t>Say: "Your biggest competitor isn't another business. It's the gap between the customer who walked in yesterday and the moment you forget each other."</a:t>
@@ -1023,7 +861,7 @@
             <a:spLocks noGrp="1"/>
           </p:cNvSpPr>
           <p:nvPr>
-            <p:ph type="sldNum" idx="5" sz="quarter"/>
+            <p:ph type="sldNum" sz="quarter" idx="5"/>
           </p:nvPr>
         </p:nvSpPr>
         <p:spPr/>
@@ -1037,7 +875,7 @@
 </file>
 
 <file path=ppt/notesSlides/notesSlide3.xml><?xml version="1.0" encoding="utf-8"?>
-<p:notes xmlns:a="http://schemas.openxmlformats.org/drawingml/2006/main" xmlns:p="http://schemas.openxmlformats.org/presentationml/2006/main" xmlns:r="http://schemas.openxmlformats.org/officeDocument/2006/relationships">
+<p:notes xmlns:a="http://schemas.openxmlformats.org/drawingml/2006/main" xmlns:r="http://schemas.openxmlformats.org/officeDocument/2006/relationships" xmlns:p="http://schemas.openxmlformats.org/presentationml/2006/main">
   <p:cSld>
     <p:spTree>
       <p:nvGrpSpPr>
@@ -1057,7 +895,7 @@
         <p:nvSpPr>
           <p:cNvPr id="2" name="Slide Image Placeholder 1"/>
           <p:cNvSpPr>
-            <a:spLocks noGrp="1"/>
+            <a:spLocks noGrp="1" noRot="1" noChangeAspect="1"/>
           </p:cNvSpPr>
           <p:nvPr>
             <p:ph type="sldImg" idx="2"/>
@@ -1072,7 +910,7 @@
             <a:spLocks noGrp="1"/>
           </p:cNvSpPr>
           <p:nvPr>
-            <p:ph type="body" idx="3" sz="quarter"/>
+            <p:ph type="body" sz="quarter" idx="3"/>
           </p:nvPr>
         </p:nvSpPr>
         <p:spPr/>
@@ -1084,31 +922,41 @@
               <a:t>SLIDE 3 — THE COST CALCULATOR (2 min)</a:t>
             </a:r>
           </a:p>
-          <a:p/>
+          <a:p>
+            <a:endParaRPr/>
+          </a:p>
           <a:p>
             <a:r>
               <a:t>This slide should feel personal. Before showing it, say:</a:t>
             </a:r>
           </a:p>
-          <a:p/>
+          <a:p>
+            <a:endParaRPr/>
+          </a:p>
           <a:p>
             <a:r>
               <a:t>"Let me put your specific numbers in here. How many customers do you serve per week? What's your average spend?"</a:t>
             </a:r>
           </a:p>
-          <a:p/>
+          <a:p>
+            <a:endParaRPr/>
+          </a:p>
           <a:p>
             <a:r>
               <a:t>Adjust the equation mentally and share the result. The default is conservative — 200 customers, 60% lapse, ฿400 average. Many merchants will realise the real number is higher.</a:t>
             </a:r>
           </a:p>
-          <a:p/>
+          <a:p>
+            <a:endParaRPr/>
+          </a:p>
           <a:p>
             <a:r>
               <a:t>Say: "That's not money you're losing to competitors. That's money you already earned — but never collected twice."</a:t>
             </a:r>
           </a:p>
-          <a:p/>
+          <a:p>
+            <a:endParaRPr/>
+          </a:p>
           <a:p>
             <a:r>
               <a:t>This is the emotional peak of the presentation. Do not rush past it.</a:t>
@@ -1123,7 +971,7 @@
             <a:spLocks noGrp="1"/>
           </p:cNvSpPr>
           <p:nvPr>
-            <p:ph type="sldNum" idx="5" sz="quarter"/>
+            <p:ph type="sldNum" sz="quarter" idx="5"/>
           </p:nvPr>
         </p:nvSpPr>
         <p:spPr/>
@@ -1137,7 +985,7 @@
 </file>
 
 <file path=ppt/notesSlides/notesSlide4.xml><?xml version="1.0" encoding="utf-8"?>
-<p:notes xmlns:a="http://schemas.openxmlformats.org/drawingml/2006/main" xmlns:p="http://schemas.openxmlformats.org/presentationml/2006/main" xmlns:r="http://schemas.openxmlformats.org/officeDocument/2006/relationships">
+<p:notes xmlns:a="http://schemas.openxmlformats.org/drawingml/2006/main" xmlns:r="http://schemas.openxmlformats.org/officeDocument/2006/relationships" xmlns:p="http://schemas.openxmlformats.org/presentationml/2006/main">
   <p:cSld>
     <p:spTree>
       <p:nvGrpSpPr>
@@ -1157,7 +1005,7 @@
         <p:nvSpPr>
           <p:cNvPr id="2" name="Slide Image Placeholder 1"/>
           <p:cNvSpPr>
-            <a:spLocks noGrp="1"/>
+            <a:spLocks noGrp="1" noRot="1" noChangeAspect="1"/>
           </p:cNvSpPr>
           <p:nvPr>
             <p:ph type="sldImg" idx="2"/>
@@ -1172,7 +1020,7 @@
             <a:spLocks noGrp="1"/>
           </p:cNvSpPr>
           <p:nvPr>
-            <p:ph type="body" idx="3" sz="quarter"/>
+            <p:ph type="body" sz="quarter" idx="3"/>
           </p:nvPr>
         </p:nvSpPr>
         <p:spPr/>
@@ -1184,25 +1032,33 @@
               <a:t>SLIDE 4 — THE PIVOT (1 min)</a:t>
             </a:r>
           </a:p>
-          <a:p/>
+          <a:p>
+            <a:endParaRPr/>
+          </a:p>
           <a:p>
             <a:r>
               <a:t>This is the emotional turning point. From pain to possibility.</a:t>
             </a:r>
           </a:p>
-          <a:p/>
+          <a:p>
+            <a:endParaRPr/>
+          </a:p>
           <a:p>
             <a:r>
               <a:t>Don't answer the question yet. Just let it sit.</a:t>
             </a:r>
           </a:p>
-          <a:p/>
+          <a:p>
+            <a:endParaRPr/>
+          </a:p>
           <a:p>
             <a:r>
               <a:t>Say: "That's not a fantasy. That's a number businesses using OneMember actually see. And we can show you exactly how."</a:t>
             </a:r>
           </a:p>
-          <a:p/>
+          <a:p>
+            <a:endParaRPr/>
+          </a:p>
           <a:p>
             <a:r>
               <a:t>Then move to the next slide.</a:t>
@@ -1217,7 +1073,7 @@
             <a:spLocks noGrp="1"/>
           </p:cNvSpPr>
           <p:nvPr>
-            <p:ph type="sldNum" idx="5" sz="quarter"/>
+            <p:ph type="sldNum" sz="quarter" idx="5"/>
           </p:nvPr>
         </p:nvSpPr>
         <p:spPr/>
@@ -1231,7 +1087,7 @@
 </file>
 
 <file path=ppt/notesSlides/notesSlide5.xml><?xml version="1.0" encoding="utf-8"?>
-<p:notes xmlns:a="http://schemas.openxmlformats.org/drawingml/2006/main" xmlns:p="http://schemas.openxmlformats.org/presentationml/2006/main" xmlns:r="http://schemas.openxmlformats.org/officeDocument/2006/relationships">
+<p:notes xmlns:a="http://schemas.openxmlformats.org/drawingml/2006/main" xmlns:r="http://schemas.openxmlformats.org/officeDocument/2006/relationships" xmlns:p="http://schemas.openxmlformats.org/presentationml/2006/main">
   <p:cSld>
     <p:spTree>
       <p:nvGrpSpPr>
@@ -1251,7 +1107,7 @@
         <p:nvSpPr>
           <p:cNvPr id="2" name="Slide Image Placeholder 1"/>
           <p:cNvSpPr>
-            <a:spLocks noGrp="1"/>
+            <a:spLocks noGrp="1" noRot="1" noChangeAspect="1"/>
           </p:cNvSpPr>
           <p:nvPr>
             <p:ph type="sldImg" idx="2"/>
@@ -1266,7 +1122,7 @@
             <a:spLocks noGrp="1"/>
           </p:cNvSpPr>
           <p:nvPr>
-            <p:ph type="body" idx="3" sz="quarter"/>
+            <p:ph type="body" sz="quarter" idx="3"/>
           </p:nvPr>
         </p:nvSpPr>
         <p:spPr/>
@@ -1278,19 +1134,25 @@
               <a:t>SLIDE 5 — THE SOLUTION (2 min)</a:t>
             </a:r>
           </a:p>
-          <a:p/>
+          <a:p>
+            <a:endParaRPr/>
+          </a:p>
           <a:p>
             <a:r>
               <a:t>This is the first time OneMember is formally introduced. Keep it brief. The product earns its place after the problem is established.</a:t>
             </a:r>
           </a:p>
-          <a:p/>
+          <a:p>
+            <a:endParaRPr/>
+          </a:p>
           <a:p>
             <a:r>
               <a:t>Walk through each pillar: "We built OneMember around five outcomes — not five features. Every one of them exists to do one thing: get your customers to come back."</a:t>
             </a:r>
           </a:p>
-          <a:p/>
+          <a:p>
+            <a:endParaRPr/>
+          </a:p>
           <a:p>
             <a:r>
               <a:t>Do not demo the software yet. That comes in the demo session.</a:t>
@@ -1305,7 +1167,7 @@
             <a:spLocks noGrp="1"/>
           </p:cNvSpPr>
           <p:nvPr>
-            <p:ph type="sldNum" idx="5" sz="quarter"/>
+            <p:ph type="sldNum" sz="quarter" idx="5"/>
           </p:nvPr>
         </p:nvSpPr>
         <p:spPr/>
@@ -1319,7 +1181,7 @@
 </file>
 
 <file path=ppt/notesSlides/notesSlide6.xml><?xml version="1.0" encoding="utf-8"?>
-<p:notes xmlns:a="http://schemas.openxmlformats.org/drawingml/2006/main" xmlns:p="http://schemas.openxmlformats.org/presentationml/2006/main" xmlns:r="http://schemas.openxmlformats.org/officeDocument/2006/relationships">
+<p:notes xmlns:a="http://schemas.openxmlformats.org/drawingml/2006/main" xmlns:r="http://schemas.openxmlformats.org/officeDocument/2006/relationships" xmlns:p="http://schemas.openxmlformats.org/presentationml/2006/main">
   <p:cSld>
     <p:spTree>
       <p:nvGrpSpPr>
@@ -1339,7 +1201,7 @@
         <p:nvSpPr>
           <p:cNvPr id="2" name="Slide Image Placeholder 1"/>
           <p:cNvSpPr>
-            <a:spLocks noGrp="1"/>
+            <a:spLocks noGrp="1" noRot="1" noChangeAspect="1"/>
           </p:cNvSpPr>
           <p:nvPr>
             <p:ph type="sldImg" idx="2"/>
@@ -1354,7 +1216,7 @@
             <a:spLocks noGrp="1"/>
           </p:cNvSpPr>
           <p:nvPr>
-            <p:ph type="body" idx="3" sz="quarter"/>
+            <p:ph type="body" sz="quarter" idx="3"/>
           </p:nvPr>
         </p:nvSpPr>
         <p:spPr/>
@@ -1366,19 +1228,25 @@
               <a:t>SLIDE 6 — HOW IT WORKS (1.5 min)</a:t>
             </a:r>
           </a:p>
-          <a:p/>
+          <a:p>
+            <a:endParaRPr/>
+          </a:p>
           <a:p>
             <a:r>
               <a:t>Keep this fast. This is process, not pitch.</a:t>
             </a:r>
           </a:p>
-          <a:p/>
+          <a:p>
+            <a:endParaRPr/>
+          </a:p>
           <a:p>
             <a:r>
               <a:t>"The customer experience is three steps: scan, earn, return. That's it. For you, it's even simpler — you set it up once, and it runs."</a:t>
             </a:r>
           </a:p>
-          <a:p/>
+          <a:p>
+            <a:endParaRPr/>
+          </a:p>
           <a:p>
             <a:r>
               <a:t>If the merchant is tech-skeptical, emphasise: "No app download for your customers. No hardware. Just a QR code you print or display on your counter."</a:t>
@@ -1393,7 +1261,7 @@
             <a:spLocks noGrp="1"/>
           </p:cNvSpPr>
           <p:nvPr>
-            <p:ph type="sldNum" idx="5" sz="quarter"/>
+            <p:ph type="sldNum" sz="quarter" idx="5"/>
           </p:nvPr>
         </p:nvSpPr>
         <p:spPr/>
@@ -1407,7 +1275,7 @@
 </file>
 
 <file path=ppt/notesSlides/notesSlide7.xml><?xml version="1.0" encoding="utf-8"?>
-<p:notes xmlns:a="http://schemas.openxmlformats.org/drawingml/2006/main" xmlns:p="http://schemas.openxmlformats.org/presentationml/2006/main" xmlns:r="http://schemas.openxmlformats.org/officeDocument/2006/relationships">
+<p:notes xmlns:a="http://schemas.openxmlformats.org/drawingml/2006/main" xmlns:r="http://schemas.openxmlformats.org/officeDocument/2006/relationships" xmlns:p="http://schemas.openxmlformats.org/presentationml/2006/main">
   <p:cSld>
     <p:spTree>
       <p:nvGrpSpPr>
@@ -1427,7 +1295,7 @@
         <p:nvSpPr>
           <p:cNvPr id="2" name="Slide Image Placeholder 1"/>
           <p:cNvSpPr>
-            <a:spLocks noGrp="1"/>
+            <a:spLocks noGrp="1" noRot="1" noChangeAspect="1"/>
           </p:cNvSpPr>
           <p:nvPr>
             <p:ph type="sldImg" idx="2"/>
@@ -1442,7 +1310,7 @@
             <a:spLocks noGrp="1"/>
           </p:cNvSpPr>
           <p:nvPr>
-            <p:ph type="body" idx="3" sz="quarter"/>
+            <p:ph type="body" sz="quarter" idx="3"/>
           </p:nvPr>
         </p:nvSpPr>
         <p:spPr/>
@@ -1454,19 +1322,25 @@
               <a:t>SLIDE 7 — GROWTH PROJECTION (1.5 min)</a:t>
             </a:r>
           </a:p>
-          <a:p/>
+          <a:p>
+            <a:endParaRPr/>
+          </a:p>
           <a:p>
             <a:r>
               <a:t>Frame this as a story of transformation, not a forecast.</a:t>
             </a:r>
           </a:p>
-          <a:p/>
+          <a:p>
+            <a:endParaRPr/>
+          </a:p>
           <a:p>
             <a:r>
               <a:t>"In month one, you're building your database. In month three, you know your customers by name. In month six, they're coming back because you've given them a reason to. In year one, the cumulative effect is a business that looks fundamentally different."</a:t>
             </a:r>
           </a:p>
-          <a:p/>
+          <a:p>
+            <a:endParaRPr/>
+          </a:p>
           <a:p>
             <a:r>
               <a:t>The ฿545K figure is based on conservative assumptions. Invite the merchant to put their own numbers in — the ROI calculator does this precisely.</a:t>
@@ -1481,7 +1355,7 @@
             <a:spLocks noGrp="1"/>
           </p:cNvSpPr>
           <p:nvPr>
-            <p:ph type="sldNum" idx="5" sz="quarter"/>
+            <p:ph type="sldNum" sz="quarter" idx="5"/>
           </p:nvPr>
         </p:nvSpPr>
         <p:spPr/>
@@ -1495,7 +1369,7 @@
 </file>
 
 <file path=ppt/notesSlides/notesSlide8.xml><?xml version="1.0" encoding="utf-8"?>
-<p:notes xmlns:a="http://schemas.openxmlformats.org/drawingml/2006/main" xmlns:p="http://schemas.openxmlformats.org/presentationml/2006/main" xmlns:r="http://schemas.openxmlformats.org/officeDocument/2006/relationships">
+<p:notes xmlns:a="http://schemas.openxmlformats.org/drawingml/2006/main" xmlns:r="http://schemas.openxmlformats.org/officeDocument/2006/relationships" xmlns:p="http://schemas.openxmlformats.org/presentationml/2006/main">
   <p:cSld>
     <p:spTree>
       <p:nvGrpSpPr>
@@ -1515,7 +1389,7 @@
         <p:nvSpPr>
           <p:cNvPr id="2" name="Slide Image Placeholder 1"/>
           <p:cNvSpPr>
-            <a:spLocks noGrp="1"/>
+            <a:spLocks noGrp="1" noRot="1" noChangeAspect="1"/>
           </p:cNvSpPr>
           <p:nvPr>
             <p:ph type="sldImg" idx="2"/>
@@ -1530,7 +1404,7 @@
             <a:spLocks noGrp="1"/>
           </p:cNvSpPr>
           <p:nvPr>
-            <p:ph type="body" idx="3" sz="quarter"/>
+            <p:ph type="body" sz="quarter" idx="3"/>
           </p:nvPr>
         </p:nvSpPr>
         <p:spPr/>
@@ -1542,19 +1416,25 @@
               <a:t>SLIDE 8 — CASE STUDIES (2 min)</a:t>
             </a:r>
           </a:p>
-          <a:p/>
+          <a:p>
+            <a:endParaRPr/>
+          </a:p>
           <a:p>
             <a:r>
               <a:t>Note: These are representative examples. If you have real merchant data, replace these now.</a:t>
             </a:r>
           </a:p>
-          <a:p/>
+          <a:p>
+            <a:endParaRPr/>
+          </a:p>
           <a:p>
             <a:r>
               <a:t>Present each case briefly: business type, the result, the quote. Then ask: "Which of these sounds most like your business?"</a:t>
             </a:r>
           </a:p>
-          <a:p/>
+          <a:p>
+            <a:endParaRPr/>
+          </a:p>
           <a:p>
             <a:r>
               <a:t>The goal is to make the merchant visualise themselves in one of these stories. The quote on each case should do the emotional work — let them read it.</a:t>
@@ -1569,7 +1449,7 @@
             <a:spLocks noGrp="1"/>
           </p:cNvSpPr>
           <p:nvPr>
-            <p:ph type="sldNum" idx="5" sz="quarter"/>
+            <p:ph type="sldNum" sz="quarter" idx="5"/>
           </p:nvPr>
         </p:nvSpPr>
         <p:spPr/>
@@ -1583,7 +1463,7 @@
 </file>
 
 <file path=ppt/notesSlides/notesSlide9.xml><?xml version="1.0" encoding="utf-8"?>
-<p:notes xmlns:a="http://schemas.openxmlformats.org/drawingml/2006/main" xmlns:p="http://schemas.openxmlformats.org/presentationml/2006/main" xmlns:r="http://schemas.openxmlformats.org/officeDocument/2006/relationships">
+<p:notes xmlns:a="http://schemas.openxmlformats.org/drawingml/2006/main" xmlns:r="http://schemas.openxmlformats.org/officeDocument/2006/relationships" xmlns:p="http://schemas.openxmlformats.org/presentationml/2006/main">
   <p:cSld>
     <p:spTree>
       <p:nvGrpSpPr>
@@ -1603,7 +1483,7 @@
         <p:nvSpPr>
           <p:cNvPr id="2" name="Slide Image Placeholder 1"/>
           <p:cNvSpPr>
-            <a:spLocks noGrp="1"/>
+            <a:spLocks noGrp="1" noRot="1" noChangeAspect="1"/>
           </p:cNvSpPr>
           <p:nvPr>
             <p:ph type="sldImg" idx="2"/>
@@ -1618,7 +1498,7 @@
             <a:spLocks noGrp="1"/>
           </p:cNvSpPr>
           <p:nvPr>
-            <p:ph type="body" idx="3" sz="quarter"/>
+            <p:ph type="body" sz="quarter" idx="3"/>
           </p:nvPr>
         </p:nvSpPr>
         <p:spPr/>
@@ -1630,37 +1510,49 @@
               <a:t>SLIDE 9 — ROI CALCULATOR (3 min)</a:t>
             </a:r>
           </a:p>
-          <a:p/>
+          <a:p>
+            <a:endParaRPr/>
+          </a:p>
           <a:p>
             <a:r>
               <a:t>This is the most important slide in the presentation. Personalise it.</a:t>
             </a:r>
           </a:p>
-          <a:p/>
+          <a:p>
+            <a:endParaRPr/>
+          </a:p>
           <a:p>
             <a:r>
               <a:t>Before revealing the calculation, say: "Let me put your numbers in."</a:t>
             </a:r>
           </a:p>
-          <a:p/>
+          <a:p>
+            <a:endParaRPr/>
+          </a:p>
           <a:p>
             <a:r>
               <a:t>Ask: How many customers per week? What's the average spend? Adjust mentally or on the ROI Calculator spreadsheet.</a:t>
             </a:r>
           </a:p>
-          <a:p/>
+          <a:p>
+            <a:endParaRPr/>
+          </a:p>
           <a:p>
             <a:r>
               <a:t>When you show the ฿45,000+ figure: "That's not a forecast. That's a conservative estimate based on the average improvement we see at similar businesses."</a:t>
             </a:r>
           </a:p>
-          <a:p/>
+          <a:p>
+            <a:endParaRPr/>
+          </a:p>
           <a:p>
             <a:r>
               <a:t>ROI of 22× means: for every ฿1 they spend on OneMember, they get ฿22 back. The payback period is under 2 weeks.</a:t>
             </a:r>
           </a:p>
-          <a:p/>
+          <a:p>
+            <a:endParaRPr/>
+          </a:p>
           <a:p>
             <a:r>
               <a:t>Handover: give them the physical ROI Calculator so they can run their own numbers after the meeting.</a:t>
@@ -1675,7 +1567,7 @@
             <a:spLocks noGrp="1"/>
           </p:cNvSpPr>
           <p:nvPr>
-            <p:ph type="sldNum" idx="5" sz="quarter"/>
+            <p:ph type="sldNum" sz="quarter" idx="5"/>
           </p:nvPr>
         </p:nvSpPr>
         <p:spPr/>
@@ -1726,10 +1618,9 @@
           <a:lstStyle/>
           <a:p>
             <a:r>
-              <a:rPr lang="en-US" smtClean="0"/>
+              <a:rPr lang="en-US"/>
               <a:t>Click to edit Master title style</a:t>
             </a:r>
-            <a:endParaRPr lang="en-US"/>
           </a:p>
         </p:txBody>
       </p:sp>
@@ -1845,10 +1736,9 @@
           </a:lstStyle>
           <a:p>
             <a:r>
-              <a:rPr lang="en-US" smtClean="0"/>
+              <a:rPr lang="en-US"/>
               <a:t>Click to edit Master subtitle style</a:t>
             </a:r>
-            <a:endParaRPr lang="en-US"/>
           </a:p>
         </p:txBody>
       </p:sp>
@@ -1869,7 +1759,7 @@
           <a:p>
             <a:fld id="{5BCAD085-E8A6-8845-BD4E-CB4CCA059FC4}" type="datetimeFigureOut">
               <a:rPr lang="en-US" smtClean="0"/>
-              <a:t>1/27/13</a:t>
+              <a:t>7/3/26</a:t>
             </a:fld>
             <a:endParaRPr lang="en-US"/>
           </a:p>
@@ -1963,10 +1853,9 @@
           <a:lstStyle/>
           <a:p>
             <a:r>
-              <a:rPr lang="en-US" smtClean="0"/>
+              <a:rPr lang="en-US"/>
               <a:t>Click to edit Master title style</a:t>
             </a:r>
-            <a:endParaRPr lang="en-US"/>
           </a:p>
         </p:txBody>
       </p:sp>
@@ -1987,38 +1876,37 @@
           <a:p>
             <a:pPr lvl="0"/>
             <a:r>
-              <a:rPr lang="en-US" smtClean="0"/>
+              <a:rPr lang="en-US"/>
               <a:t>Click to edit Master text styles</a:t>
             </a:r>
           </a:p>
           <a:p>
             <a:pPr lvl="1"/>
             <a:r>
-              <a:rPr lang="en-US" smtClean="0"/>
+              <a:rPr lang="en-US"/>
               <a:t>Second level</a:t>
             </a:r>
           </a:p>
           <a:p>
             <a:pPr lvl="2"/>
             <a:r>
-              <a:rPr lang="en-US" smtClean="0"/>
+              <a:rPr lang="en-US"/>
               <a:t>Third level</a:t>
             </a:r>
           </a:p>
           <a:p>
             <a:pPr lvl="3"/>
             <a:r>
-              <a:rPr lang="en-US" smtClean="0"/>
+              <a:rPr lang="en-US"/>
               <a:t>Fourth level</a:t>
             </a:r>
           </a:p>
           <a:p>
             <a:pPr lvl="4"/>
             <a:r>
-              <a:rPr lang="en-US" smtClean="0"/>
+              <a:rPr lang="en-US"/>
               <a:t>Fifth level</a:t>
             </a:r>
-            <a:endParaRPr lang="en-US"/>
           </a:p>
         </p:txBody>
       </p:sp>
@@ -2039,7 +1927,7 @@
           <a:p>
             <a:fld id="{5BCAD085-E8A6-8845-BD4E-CB4CCA059FC4}" type="datetimeFigureOut">
               <a:rPr lang="en-US" smtClean="0"/>
-              <a:t>1/27/13</a:t>
+              <a:t>7/3/26</a:t>
             </a:fld>
             <a:endParaRPr lang="en-US"/>
           </a:p>
@@ -2138,10 +2026,9 @@
           <a:lstStyle/>
           <a:p>
             <a:r>
-              <a:rPr lang="en-US" smtClean="0"/>
+              <a:rPr lang="en-US"/>
               <a:t>Click to edit Master title style</a:t>
             </a:r>
-            <a:endParaRPr lang="en-US"/>
           </a:p>
         </p:txBody>
       </p:sp>
@@ -2167,38 +2054,37 @@
           <a:p>
             <a:pPr lvl="0"/>
             <a:r>
-              <a:rPr lang="en-US" smtClean="0"/>
+              <a:rPr lang="en-US"/>
               <a:t>Click to edit Master text styles</a:t>
             </a:r>
           </a:p>
           <a:p>
             <a:pPr lvl="1"/>
             <a:r>
-              <a:rPr lang="en-US" smtClean="0"/>
+              <a:rPr lang="en-US"/>
               <a:t>Second level</a:t>
             </a:r>
           </a:p>
           <a:p>
             <a:pPr lvl="2"/>
             <a:r>
-              <a:rPr lang="en-US" smtClean="0"/>
+              <a:rPr lang="en-US"/>
               <a:t>Third level</a:t>
             </a:r>
           </a:p>
           <a:p>
             <a:pPr lvl="3"/>
             <a:r>
-              <a:rPr lang="en-US" smtClean="0"/>
+              <a:rPr lang="en-US"/>
               <a:t>Fourth level</a:t>
             </a:r>
           </a:p>
           <a:p>
             <a:pPr lvl="4"/>
             <a:r>
-              <a:rPr lang="en-US" smtClean="0"/>
+              <a:rPr lang="en-US"/>
               <a:t>Fifth level</a:t>
             </a:r>
-            <a:endParaRPr lang="en-US"/>
           </a:p>
         </p:txBody>
       </p:sp>
@@ -2219,7 +2105,7 @@
           <a:p>
             <a:fld id="{5BCAD085-E8A6-8845-BD4E-CB4CCA059FC4}" type="datetimeFigureOut">
               <a:rPr lang="en-US" smtClean="0"/>
-              <a:t>1/27/13</a:t>
+              <a:t>7/3/26</a:t>
             </a:fld>
             <a:endParaRPr lang="en-US"/>
           </a:p>
@@ -2313,10 +2199,9 @@
           <a:lstStyle/>
           <a:p>
             <a:r>
-              <a:rPr lang="en-US" smtClean="0"/>
+              <a:rPr lang="en-US"/>
               <a:t>Click to edit Master title style</a:t>
             </a:r>
-            <a:endParaRPr lang="en-US"/>
           </a:p>
         </p:txBody>
       </p:sp>
@@ -2337,38 +2222,37 @@
           <a:p>
             <a:pPr lvl="0"/>
             <a:r>
-              <a:rPr lang="en-US" smtClean="0"/>
+              <a:rPr lang="en-US"/>
               <a:t>Click to edit Master text styles</a:t>
             </a:r>
           </a:p>
           <a:p>
             <a:pPr lvl="1"/>
             <a:r>
-              <a:rPr lang="en-US" smtClean="0"/>
+              <a:rPr lang="en-US"/>
               <a:t>Second level</a:t>
             </a:r>
           </a:p>
           <a:p>
             <a:pPr lvl="2"/>
             <a:r>
-              <a:rPr lang="en-US" smtClean="0"/>
+              <a:rPr lang="en-US"/>
               <a:t>Third level</a:t>
             </a:r>
           </a:p>
           <a:p>
             <a:pPr lvl="3"/>
             <a:r>
-              <a:rPr lang="en-US" smtClean="0"/>
+              <a:rPr lang="en-US"/>
               <a:t>Fourth level</a:t>
             </a:r>
           </a:p>
           <a:p>
             <a:pPr lvl="4"/>
             <a:r>
-              <a:rPr lang="en-US" smtClean="0"/>
+              <a:rPr lang="en-US"/>
               <a:t>Fifth level</a:t>
             </a:r>
-            <a:endParaRPr lang="en-US"/>
           </a:p>
         </p:txBody>
       </p:sp>
@@ -2389,7 +2273,7 @@
           <a:p>
             <a:fld id="{5BCAD085-E8A6-8845-BD4E-CB4CCA059FC4}" type="datetimeFigureOut">
               <a:rPr lang="en-US" smtClean="0"/>
-              <a:t>1/27/13</a:t>
+              <a:t>7/3/26</a:t>
             </a:fld>
             <a:endParaRPr lang="en-US"/>
           </a:p>
@@ -2492,10 +2376,9 @@
           </a:lstStyle>
           <a:p>
             <a:r>
-              <a:rPr lang="en-US" smtClean="0"/>
+              <a:rPr lang="en-US"/>
               <a:t>Click to edit Master title style</a:t>
             </a:r>
-            <a:endParaRPr lang="en-US"/>
           </a:p>
         </p:txBody>
       </p:sp>
@@ -2612,7 +2495,7 @@
           <a:p>
             <a:pPr lvl="0"/>
             <a:r>
-              <a:rPr lang="en-US" smtClean="0"/>
+              <a:rPr lang="en-US"/>
               <a:t>Click to edit Master text styles</a:t>
             </a:r>
           </a:p>
@@ -2635,7 +2518,7 @@
           <a:p>
             <a:fld id="{5BCAD085-E8A6-8845-BD4E-CB4CCA059FC4}" type="datetimeFigureOut">
               <a:rPr lang="en-US" smtClean="0"/>
-              <a:t>1/27/13</a:t>
+              <a:t>7/3/26</a:t>
             </a:fld>
             <a:endParaRPr lang="en-US"/>
           </a:p>
@@ -2729,10 +2612,9 @@
           <a:lstStyle/>
           <a:p>
             <a:r>
-              <a:rPr lang="en-US" smtClean="0"/>
+              <a:rPr lang="en-US"/>
               <a:t>Click to edit Master title style</a:t>
             </a:r>
-            <a:endParaRPr lang="en-US"/>
           </a:p>
         </p:txBody>
       </p:sp>
@@ -2786,38 +2668,37 @@
           <a:p>
             <a:pPr lvl="0"/>
             <a:r>
-              <a:rPr lang="en-US" smtClean="0"/>
+              <a:rPr lang="en-US"/>
               <a:t>Click to edit Master text styles</a:t>
             </a:r>
           </a:p>
           <a:p>
             <a:pPr lvl="1"/>
             <a:r>
-              <a:rPr lang="en-US" smtClean="0"/>
+              <a:rPr lang="en-US"/>
               <a:t>Second level</a:t>
             </a:r>
           </a:p>
           <a:p>
             <a:pPr lvl="2"/>
             <a:r>
-              <a:rPr lang="en-US" smtClean="0"/>
+              <a:rPr lang="en-US"/>
               <a:t>Third level</a:t>
             </a:r>
           </a:p>
           <a:p>
             <a:pPr lvl="3"/>
             <a:r>
-              <a:rPr lang="en-US" smtClean="0"/>
+              <a:rPr lang="en-US"/>
               <a:t>Fourth level</a:t>
             </a:r>
           </a:p>
           <a:p>
             <a:pPr lvl="4"/>
             <a:r>
-              <a:rPr lang="en-US" smtClean="0"/>
+              <a:rPr lang="en-US"/>
               <a:t>Fifth level</a:t>
             </a:r>
-            <a:endParaRPr lang="en-US"/>
           </a:p>
         </p:txBody>
       </p:sp>
@@ -2871,38 +2752,37 @@
           <a:p>
             <a:pPr lvl="0"/>
             <a:r>
-              <a:rPr lang="en-US" smtClean="0"/>
+              <a:rPr lang="en-US"/>
               <a:t>Click to edit Master text styles</a:t>
             </a:r>
           </a:p>
           <a:p>
             <a:pPr lvl="1"/>
             <a:r>
-              <a:rPr lang="en-US" smtClean="0"/>
+              <a:rPr lang="en-US"/>
               <a:t>Second level</a:t>
             </a:r>
           </a:p>
           <a:p>
             <a:pPr lvl="2"/>
             <a:r>
-              <a:rPr lang="en-US" smtClean="0"/>
+              <a:rPr lang="en-US"/>
               <a:t>Third level</a:t>
             </a:r>
           </a:p>
           <a:p>
             <a:pPr lvl="3"/>
             <a:r>
-              <a:rPr lang="en-US" smtClean="0"/>
+              <a:rPr lang="en-US"/>
               <a:t>Fourth level</a:t>
             </a:r>
           </a:p>
           <a:p>
             <a:pPr lvl="4"/>
             <a:r>
-              <a:rPr lang="en-US" smtClean="0"/>
+              <a:rPr lang="en-US"/>
               <a:t>Fifth level</a:t>
             </a:r>
-            <a:endParaRPr lang="en-US"/>
           </a:p>
         </p:txBody>
       </p:sp>
@@ -2923,7 +2803,7 @@
           <a:p>
             <a:fld id="{5BCAD085-E8A6-8845-BD4E-CB4CCA059FC4}" type="datetimeFigureOut">
               <a:rPr lang="en-US" smtClean="0"/>
-              <a:t>1/27/13</a:t>
+              <a:t>7/3/26</a:t>
             </a:fld>
             <a:endParaRPr lang="en-US"/>
           </a:p>
@@ -3021,10 +2901,9 @@
           </a:lstStyle>
           <a:p>
             <a:r>
-              <a:rPr lang="en-US" smtClean="0"/>
+              <a:rPr lang="en-US"/>
               <a:t>Click to edit Master title style</a:t>
             </a:r>
-            <a:endParaRPr lang="en-US"/>
           </a:p>
         </p:txBody>
       </p:sp>
@@ -3087,7 +2966,7 @@
           <a:p>
             <a:pPr lvl="0"/>
             <a:r>
-              <a:rPr lang="en-US" smtClean="0"/>
+              <a:rPr lang="en-US"/>
               <a:t>Click to edit Master text styles</a:t>
             </a:r>
           </a:p>
@@ -3143,38 +3022,37 @@
           <a:p>
             <a:pPr lvl="0"/>
             <a:r>
-              <a:rPr lang="en-US" smtClean="0"/>
+              <a:rPr lang="en-US"/>
               <a:t>Click to edit Master text styles</a:t>
             </a:r>
           </a:p>
           <a:p>
             <a:pPr lvl="1"/>
             <a:r>
-              <a:rPr lang="en-US" smtClean="0"/>
+              <a:rPr lang="en-US"/>
               <a:t>Second level</a:t>
             </a:r>
           </a:p>
           <a:p>
             <a:pPr lvl="2"/>
             <a:r>
-              <a:rPr lang="en-US" smtClean="0"/>
+              <a:rPr lang="en-US"/>
               <a:t>Third level</a:t>
             </a:r>
           </a:p>
           <a:p>
             <a:pPr lvl="3"/>
             <a:r>
-              <a:rPr lang="en-US" smtClean="0"/>
+              <a:rPr lang="en-US"/>
               <a:t>Fourth level</a:t>
             </a:r>
           </a:p>
           <a:p>
             <a:pPr lvl="4"/>
             <a:r>
-              <a:rPr lang="en-US" smtClean="0"/>
+              <a:rPr lang="en-US"/>
               <a:t>Fifth level</a:t>
             </a:r>
-            <a:endParaRPr lang="en-US"/>
           </a:p>
         </p:txBody>
       </p:sp>
@@ -3237,7 +3115,7 @@
           <a:p>
             <a:pPr lvl="0"/>
             <a:r>
-              <a:rPr lang="en-US" smtClean="0"/>
+              <a:rPr lang="en-US"/>
               <a:t>Click to edit Master text styles</a:t>
             </a:r>
           </a:p>
@@ -3293,38 +3171,37 @@
           <a:p>
             <a:pPr lvl="0"/>
             <a:r>
-              <a:rPr lang="en-US" smtClean="0"/>
+              <a:rPr lang="en-US"/>
               <a:t>Click to edit Master text styles</a:t>
             </a:r>
           </a:p>
           <a:p>
             <a:pPr lvl="1"/>
             <a:r>
-              <a:rPr lang="en-US" smtClean="0"/>
+              <a:rPr lang="en-US"/>
               <a:t>Second level</a:t>
             </a:r>
           </a:p>
           <a:p>
             <a:pPr lvl="2"/>
             <a:r>
-              <a:rPr lang="en-US" smtClean="0"/>
+              <a:rPr lang="en-US"/>
               <a:t>Third level</a:t>
             </a:r>
           </a:p>
           <a:p>
             <a:pPr lvl="3"/>
             <a:r>
-              <a:rPr lang="en-US" smtClean="0"/>
+              <a:rPr lang="en-US"/>
               <a:t>Fourth level</a:t>
             </a:r>
           </a:p>
           <a:p>
             <a:pPr lvl="4"/>
             <a:r>
-              <a:rPr lang="en-US" smtClean="0"/>
+              <a:rPr lang="en-US"/>
               <a:t>Fifth level</a:t>
             </a:r>
-            <a:endParaRPr lang="en-US"/>
           </a:p>
         </p:txBody>
       </p:sp>
@@ -3345,7 +3222,7 @@
           <a:p>
             <a:fld id="{5BCAD085-E8A6-8845-BD4E-CB4CCA059FC4}" type="datetimeFigureOut">
               <a:rPr lang="en-US" smtClean="0"/>
-              <a:t>1/27/13</a:t>
+              <a:t>7/3/26</a:t>
             </a:fld>
             <a:endParaRPr lang="en-US"/>
           </a:p>
@@ -3439,10 +3316,9 @@
           <a:lstStyle/>
           <a:p>
             <a:r>
-              <a:rPr lang="en-US" smtClean="0"/>
+              <a:rPr lang="en-US"/>
               <a:t>Click to edit Master title style</a:t>
             </a:r>
-            <a:endParaRPr lang="en-US"/>
           </a:p>
         </p:txBody>
       </p:sp>
@@ -3463,7 +3339,7 @@
           <a:p>
             <a:fld id="{5BCAD085-E8A6-8845-BD4E-CB4CCA059FC4}" type="datetimeFigureOut">
               <a:rPr lang="en-US" smtClean="0"/>
-              <a:t>1/27/13</a:t>
+              <a:t>7/3/26</a:t>
             </a:fld>
             <a:endParaRPr lang="en-US"/>
           </a:p>
@@ -3558,7 +3434,7 @@
           <a:p>
             <a:fld id="{5BCAD085-E8A6-8845-BD4E-CB4CCA059FC4}" type="datetimeFigureOut">
               <a:rPr lang="en-US" smtClean="0"/>
-              <a:t>1/27/13</a:t>
+              <a:t>7/3/26</a:t>
             </a:fld>
             <a:endParaRPr lang="en-US"/>
           </a:p>
@@ -3661,10 +3537,9 @@
           </a:lstStyle>
           <a:p>
             <a:r>
-              <a:rPr lang="en-US" smtClean="0"/>
+              <a:rPr lang="en-US"/>
               <a:t>Click to edit Master title style</a:t>
             </a:r>
-            <a:endParaRPr lang="en-US"/>
           </a:p>
         </p:txBody>
       </p:sp>
@@ -3718,38 +3593,37 @@
           <a:p>
             <a:pPr lvl="0"/>
             <a:r>
-              <a:rPr lang="en-US" smtClean="0"/>
+              <a:rPr lang="en-US"/>
               <a:t>Click to edit Master text styles</a:t>
             </a:r>
           </a:p>
           <a:p>
             <a:pPr lvl="1"/>
             <a:r>
-              <a:rPr lang="en-US" smtClean="0"/>
+              <a:rPr lang="en-US"/>
               <a:t>Second level</a:t>
             </a:r>
           </a:p>
           <a:p>
             <a:pPr lvl="2"/>
             <a:r>
-              <a:rPr lang="en-US" smtClean="0"/>
+              <a:rPr lang="en-US"/>
               <a:t>Third level</a:t>
             </a:r>
           </a:p>
           <a:p>
             <a:pPr lvl="3"/>
             <a:r>
-              <a:rPr lang="en-US" smtClean="0"/>
+              <a:rPr lang="en-US"/>
               <a:t>Fourth level</a:t>
             </a:r>
           </a:p>
           <a:p>
             <a:pPr lvl="4"/>
             <a:r>
-              <a:rPr lang="en-US" smtClean="0"/>
+              <a:rPr lang="en-US"/>
               <a:t>Fifth level</a:t>
             </a:r>
-            <a:endParaRPr lang="en-US"/>
           </a:p>
         </p:txBody>
       </p:sp>
@@ -3812,7 +3686,7 @@
           <a:p>
             <a:pPr lvl="0"/>
             <a:r>
-              <a:rPr lang="en-US" smtClean="0"/>
+              <a:rPr lang="en-US"/>
               <a:t>Click to edit Master text styles</a:t>
             </a:r>
           </a:p>
@@ -3835,7 +3709,7 @@
           <a:p>
             <a:fld id="{5BCAD085-E8A6-8845-BD4E-CB4CCA059FC4}" type="datetimeFigureOut">
               <a:rPr lang="en-US" smtClean="0"/>
-              <a:t>1/27/13</a:t>
+              <a:t>7/3/26</a:t>
             </a:fld>
             <a:endParaRPr lang="en-US"/>
           </a:p>
@@ -3938,10 +3812,9 @@
           </a:lstStyle>
           <a:p>
             <a:r>
-              <a:rPr lang="en-US" smtClean="0"/>
+              <a:rPr lang="en-US"/>
               <a:t>Click to edit Master title style</a:t>
             </a:r>
-            <a:endParaRPr lang="en-US"/>
           </a:p>
         </p:txBody>
       </p:sp>
@@ -4065,7 +3938,7 @@
           <a:p>
             <a:pPr lvl="0"/>
             <a:r>
-              <a:rPr lang="en-US" smtClean="0"/>
+              <a:rPr lang="en-US"/>
               <a:t>Click to edit Master text styles</a:t>
             </a:r>
           </a:p>
@@ -4088,7 +3961,7 @@
           <a:p>
             <a:fld id="{5BCAD085-E8A6-8845-BD4E-CB4CCA059FC4}" type="datetimeFigureOut">
               <a:rPr lang="en-US" smtClean="0"/>
-              <a:t>1/27/13</a:t>
+              <a:t>7/3/26</a:t>
             </a:fld>
             <a:endParaRPr lang="en-US"/>
           </a:p>
@@ -4197,10 +4070,9 @@
           <a:lstStyle/>
           <a:p>
             <a:r>
-              <a:rPr lang="en-US" smtClean="0"/>
+              <a:rPr lang="en-US"/>
               <a:t>Click to edit Master title style</a:t>
             </a:r>
-            <a:endParaRPr lang="en-US"/>
           </a:p>
         </p:txBody>
       </p:sp>
@@ -4231,38 +4103,37 @@
           <a:p>
             <a:pPr lvl="0"/>
             <a:r>
-              <a:rPr lang="en-US" smtClean="0"/>
+              <a:rPr lang="en-US"/>
               <a:t>Click to edit Master text styles</a:t>
             </a:r>
           </a:p>
           <a:p>
             <a:pPr lvl="1"/>
             <a:r>
-              <a:rPr lang="en-US" smtClean="0"/>
+              <a:rPr lang="en-US"/>
               <a:t>Second level</a:t>
             </a:r>
           </a:p>
           <a:p>
             <a:pPr lvl="2"/>
             <a:r>
-              <a:rPr lang="en-US" smtClean="0"/>
+              <a:rPr lang="en-US"/>
               <a:t>Third level</a:t>
             </a:r>
           </a:p>
           <a:p>
             <a:pPr lvl="3"/>
             <a:r>
-              <a:rPr lang="en-US" smtClean="0"/>
+              <a:rPr lang="en-US"/>
               <a:t>Fourth level</a:t>
             </a:r>
           </a:p>
           <a:p>
             <a:pPr lvl="4"/>
             <a:r>
-              <a:rPr lang="en-US" smtClean="0"/>
+              <a:rPr lang="en-US"/>
               <a:t>Fifth level</a:t>
             </a:r>
-            <a:endParaRPr lang="en-US"/>
           </a:p>
         </p:txBody>
       </p:sp>
@@ -4301,7 +4172,7 @@
           <a:p>
             <a:fld id="{5BCAD085-E8A6-8845-BD4E-CB4CCA059FC4}" type="datetimeFigureOut">
               <a:rPr lang="en-US" smtClean="0"/>
-              <a:t>1/27/13</a:t>
+              <a:t>7/3/26</a:t>
             </a:fld>
             <a:endParaRPr lang="en-US"/>
           </a:p>
@@ -4660,7 +4531,7 @@
 </file>
 
 <file path=ppt/slides/slide1.xml><?xml version="1.0" encoding="utf-8"?>
-<p:sld xmlns:a="http://schemas.openxmlformats.org/drawingml/2006/main" xmlns:p="http://schemas.openxmlformats.org/presentationml/2006/main" xmlns:r="http://schemas.openxmlformats.org/officeDocument/2006/relationships">
+<p:sld xmlns:a="http://schemas.openxmlformats.org/drawingml/2006/main" xmlns:r="http://schemas.openxmlformats.org/officeDocument/2006/relationships" xmlns:p="http://schemas.openxmlformats.org/presentationml/2006/main">
   <p:cSld>
     <p:bg>
       <p:bgPr>
@@ -4676,7 +4547,14 @@
         <p:cNvGrpSpPr/>
         <p:nvPr/>
       </p:nvGrpSpPr>
-      <p:grpSpPr/>
+      <p:grpSpPr>
+        <a:xfrm>
+          <a:off x="0" y="0"/>
+          <a:ext cx="0" cy="0"/>
+          <a:chOff x="0" y="0"/>
+          <a:chExt cx="0" cy="0"/>
+        </a:xfrm>
+      </p:grpSpPr>
       <p:sp>
         <p:nvSpPr>
           <p:cNvPr id="2" name="Rectangle 1"/>
@@ -4717,6 +4595,7 @@
           <a:lstStyle/>
           <a:p>
             <a:pPr algn="ctr"/>
+            <a:endParaRPr/>
           </a:p>
         </p:txBody>
       </p:sp>
@@ -4831,6 +4710,7 @@
           <a:lstStyle/>
           <a:p>
             <a:pPr algn="ctr"/>
+            <a:endParaRPr/>
           </a:p>
         </p:txBody>
       </p:sp>
@@ -4922,7 +4802,7 @@
 </file>
 
 <file path=ppt/slides/slide10.xml><?xml version="1.0" encoding="utf-8"?>
-<p:sld xmlns:a="http://schemas.openxmlformats.org/drawingml/2006/main" xmlns:p="http://schemas.openxmlformats.org/presentationml/2006/main" xmlns:r="http://schemas.openxmlformats.org/officeDocument/2006/relationships">
+<p:sld xmlns:a="http://schemas.openxmlformats.org/drawingml/2006/main" xmlns:r="http://schemas.openxmlformats.org/officeDocument/2006/relationships" xmlns:p="http://schemas.openxmlformats.org/presentationml/2006/main">
   <p:cSld>
     <p:bg>
       <p:bgPr>
@@ -4938,7 +4818,14 @@
         <p:cNvGrpSpPr/>
         <p:nvPr/>
       </p:nvGrpSpPr>
-      <p:grpSpPr/>
+      <p:grpSpPr>
+        <a:xfrm>
+          <a:off x="0" y="0"/>
+          <a:ext cx="0" cy="0"/>
+          <a:chOff x="0" y="0"/>
+          <a:chExt cx="0" cy="0"/>
+        </a:xfrm>
+      </p:grpSpPr>
       <p:sp>
         <p:nvSpPr>
           <p:cNvPr id="2" name="Rectangle 1"/>
@@ -4979,6 +4866,7 @@
           <a:lstStyle/>
           <a:p>
             <a:pPr algn="ctr"/>
+            <a:endParaRPr/>
           </a:p>
         </p:txBody>
       </p:sp>
@@ -5058,6 +4946,7 @@
           <a:lstStyle/>
           <a:p>
             <a:pPr algn="ctr"/>
+            <a:endParaRPr/>
           </a:p>
         </p:txBody>
       </p:sp>
@@ -5101,6 +4990,7 @@
           <a:lstStyle/>
           <a:p>
             <a:pPr algn="ctr"/>
+            <a:endParaRPr/>
           </a:p>
         </p:txBody>
       </p:sp>
@@ -5180,6 +5070,7 @@
           <a:lstStyle/>
           <a:p>
             <a:pPr algn="ctr"/>
+            <a:endParaRPr/>
           </a:p>
         </p:txBody>
       </p:sp>
@@ -5223,6 +5114,7 @@
           <a:lstStyle/>
           <a:p>
             <a:pPr algn="ctr"/>
+            <a:endParaRPr/>
           </a:p>
         </p:txBody>
       </p:sp>
@@ -5301,6 +5193,7 @@
           <a:lstStyle/>
           <a:p>
             <a:pPr algn="ctr"/>
+            <a:endParaRPr/>
           </a:p>
         </p:txBody>
       </p:sp>
@@ -5380,6 +5273,7 @@
           <a:lstStyle/>
           <a:p>
             <a:pPr algn="ctr"/>
+            <a:endParaRPr/>
           </a:p>
         </p:txBody>
       </p:sp>
@@ -5423,6 +5317,7 @@
           <a:lstStyle/>
           <a:p>
             <a:pPr algn="ctr"/>
+            <a:endParaRPr/>
           </a:p>
         </p:txBody>
       </p:sp>
@@ -5501,6 +5396,7 @@
           <a:lstStyle/>
           <a:p>
             <a:pPr algn="ctr"/>
+            <a:endParaRPr/>
           </a:p>
         </p:txBody>
       </p:sp>
@@ -5579,6 +5475,7 @@
           <a:lstStyle/>
           <a:p>
             <a:pPr algn="ctr"/>
+            <a:endParaRPr/>
           </a:p>
         </p:txBody>
       </p:sp>
@@ -5622,6 +5519,7 @@
           <a:lstStyle/>
           <a:p>
             <a:pPr algn="ctr"/>
+            <a:endParaRPr/>
           </a:p>
         </p:txBody>
       </p:sp>
@@ -5700,6 +5598,7 @@
           <a:lstStyle/>
           <a:p>
             <a:pPr algn="ctr"/>
+            <a:endParaRPr/>
           </a:p>
         </p:txBody>
       </p:sp>
@@ -5778,6 +5677,7 @@
           <a:lstStyle/>
           <a:p>
             <a:pPr algn="ctr"/>
+            <a:endParaRPr/>
           </a:p>
         </p:txBody>
       </p:sp>
@@ -5821,6 +5721,7 @@
           <a:lstStyle/>
           <a:p>
             <a:pPr algn="ctr"/>
+            <a:endParaRPr/>
           </a:p>
         </p:txBody>
       </p:sp>
@@ -5899,6 +5800,7 @@
           <a:lstStyle/>
           <a:p>
             <a:pPr algn="ctr"/>
+            <a:endParaRPr/>
           </a:p>
         </p:txBody>
       </p:sp>
@@ -5977,6 +5879,7 @@
           <a:lstStyle/>
           <a:p>
             <a:pPr algn="ctr"/>
+            <a:endParaRPr/>
           </a:p>
         </p:txBody>
       </p:sp>
@@ -6020,6 +5923,7 @@
           <a:lstStyle/>
           <a:p>
             <a:pPr algn="ctr"/>
+            <a:endParaRPr/>
           </a:p>
         </p:txBody>
       </p:sp>
@@ -6098,6 +6002,7 @@
           <a:lstStyle/>
           <a:p>
             <a:pPr algn="ctr"/>
+            <a:endParaRPr/>
           </a:p>
         </p:txBody>
       </p:sp>
@@ -6145,7 +6050,7 @@
 </file>
 
 <file path=ppt/slides/slide11.xml><?xml version="1.0" encoding="utf-8"?>
-<p:sld xmlns:a="http://schemas.openxmlformats.org/drawingml/2006/main" xmlns:p="http://schemas.openxmlformats.org/presentationml/2006/main" xmlns:r="http://schemas.openxmlformats.org/officeDocument/2006/relationships">
+<p:sld xmlns:a="http://schemas.openxmlformats.org/drawingml/2006/main" xmlns:r="http://schemas.openxmlformats.org/officeDocument/2006/relationships" xmlns:p="http://schemas.openxmlformats.org/presentationml/2006/main">
   <p:cSld>
     <p:bg>
       <p:bgPr>
@@ -6161,7 +6066,14 @@
         <p:cNvGrpSpPr/>
         <p:nvPr/>
       </p:nvGrpSpPr>
-      <p:grpSpPr/>
+      <p:grpSpPr>
+        <a:xfrm>
+          <a:off x="0" y="0"/>
+          <a:ext cx="0" cy="0"/>
+          <a:chOff x="0" y="0"/>
+          <a:chExt cx="0" cy="0"/>
+        </a:xfrm>
+      </p:grpSpPr>
       <p:sp>
         <p:nvSpPr>
           <p:cNvPr id="2" name="Rectangle 1"/>
@@ -6202,6 +6114,7 @@
           <a:lstStyle/>
           <a:p>
             <a:pPr algn="ctr"/>
+            <a:endParaRPr/>
           </a:p>
         </p:txBody>
       </p:sp>
@@ -6245,6 +6158,7 @@
           <a:lstStyle/>
           <a:p>
             <a:pPr algn="ctr"/>
+            <a:endParaRPr/>
           </a:p>
         </p:txBody>
       </p:sp>
@@ -6359,6 +6273,7 @@
           <a:lstStyle/>
           <a:p>
             <a:pPr algn="ctr"/>
+            <a:endParaRPr/>
           </a:p>
         </p:txBody>
       </p:sp>
@@ -6402,6 +6317,7 @@
           <a:lstStyle/>
           <a:p>
             <a:pPr algn="ctr"/>
+            <a:endParaRPr/>
           </a:p>
         </p:txBody>
       </p:sp>
@@ -6445,6 +6361,7 @@
           <a:lstStyle/>
           <a:p>
             <a:pPr algn="ctr"/>
+            <a:endParaRPr/>
           </a:p>
         </p:txBody>
       </p:sp>
@@ -6524,6 +6441,7 @@
           <a:lstStyle/>
           <a:p>
             <a:pPr algn="ctr"/>
+            <a:endParaRPr/>
           </a:p>
         </p:txBody>
       </p:sp>
@@ -6603,6 +6521,7 @@
           <a:lstStyle/>
           <a:p>
             <a:pPr algn="ctr"/>
+            <a:endParaRPr/>
           </a:p>
         </p:txBody>
       </p:sp>
@@ -6646,6 +6565,7 @@
           <a:lstStyle/>
           <a:p>
             <a:pPr algn="ctr"/>
+            <a:endParaRPr/>
           </a:p>
         </p:txBody>
       </p:sp>
@@ -6725,6 +6645,7 @@
           <a:lstStyle/>
           <a:p>
             <a:pPr algn="ctr"/>
+            <a:endParaRPr/>
           </a:p>
         </p:txBody>
       </p:sp>
@@ -6804,6 +6725,7 @@
           <a:lstStyle/>
           <a:p>
             <a:pPr algn="ctr"/>
+            <a:endParaRPr/>
           </a:p>
         </p:txBody>
       </p:sp>
@@ -6847,6 +6769,7 @@
           <a:lstStyle/>
           <a:p>
             <a:pPr algn="ctr"/>
+            <a:endParaRPr/>
           </a:p>
         </p:txBody>
       </p:sp>
@@ -6926,6 +6849,7 @@
           <a:lstStyle/>
           <a:p>
             <a:pPr algn="ctr"/>
+            <a:endParaRPr/>
           </a:p>
         </p:txBody>
       </p:sp>
@@ -7005,6 +6929,7 @@
           <a:lstStyle/>
           <a:p>
             <a:pPr algn="ctr"/>
+            <a:endParaRPr/>
           </a:p>
         </p:txBody>
       </p:sp>
@@ -7054,7 +6979,7 @@
 </file>
 
 <file path=ppt/slides/slide12.xml><?xml version="1.0" encoding="utf-8"?>
-<p:sld xmlns:a="http://schemas.openxmlformats.org/drawingml/2006/main" xmlns:p="http://schemas.openxmlformats.org/presentationml/2006/main" xmlns:r="http://schemas.openxmlformats.org/officeDocument/2006/relationships">
+<p:sld xmlns:a="http://schemas.openxmlformats.org/drawingml/2006/main" xmlns:r="http://schemas.openxmlformats.org/officeDocument/2006/relationships" xmlns:p="http://schemas.openxmlformats.org/presentationml/2006/main">
   <p:cSld>
     <p:bg>
       <p:bgPr>
@@ -7070,7 +6995,14 @@
         <p:cNvGrpSpPr/>
         <p:nvPr/>
       </p:nvGrpSpPr>
-      <p:grpSpPr/>
+      <p:grpSpPr>
+        <a:xfrm>
+          <a:off x="0" y="0"/>
+          <a:ext cx="0" cy="0"/>
+          <a:chOff x="0" y="0"/>
+          <a:chExt cx="0" cy="0"/>
+        </a:xfrm>
+      </p:grpSpPr>
       <p:sp>
         <p:nvSpPr>
           <p:cNvPr id="2" name="Rectangle 1"/>
@@ -7111,6 +7043,7 @@
           <a:lstStyle/>
           <a:p>
             <a:pPr algn="ctr"/>
+            <a:endParaRPr/>
           </a:p>
         </p:txBody>
       </p:sp>
@@ -7154,6 +7087,7 @@
           <a:lstStyle/>
           <a:p>
             <a:pPr algn="ctr"/>
+            <a:endParaRPr/>
           </a:p>
         </p:txBody>
       </p:sp>
@@ -7233,6 +7167,7 @@
           <a:lstStyle/>
           <a:p>
             <a:pPr algn="ctr"/>
+            <a:endParaRPr/>
           </a:p>
         </p:txBody>
       </p:sp>
@@ -7276,6 +7211,7 @@
           <a:lstStyle/>
           <a:p>
             <a:pPr algn="ctr"/>
+            <a:endParaRPr/>
           </a:p>
         </p:txBody>
       </p:sp>
@@ -7389,6 +7325,7 @@
           <a:lstStyle/>
           <a:p>
             <a:pPr algn="ctr"/>
+            <a:endParaRPr/>
           </a:p>
         </p:txBody>
       </p:sp>
@@ -7468,6 +7405,7 @@
           <a:lstStyle/>
           <a:p>
             <a:pPr algn="ctr"/>
+            <a:endParaRPr/>
           </a:p>
         </p:txBody>
       </p:sp>
@@ -7511,6 +7449,7 @@
           <a:lstStyle/>
           <a:p>
             <a:pPr algn="ctr"/>
+            <a:endParaRPr/>
           </a:p>
         </p:txBody>
       </p:sp>
@@ -7624,6 +7563,7 @@
           <a:lstStyle/>
           <a:p>
             <a:pPr algn="ctr"/>
+            <a:endParaRPr/>
           </a:p>
         </p:txBody>
       </p:sp>
@@ -7703,6 +7643,7 @@
           <a:lstStyle/>
           <a:p>
             <a:pPr algn="ctr"/>
+            <a:endParaRPr/>
           </a:p>
         </p:txBody>
       </p:sp>
@@ -7746,6 +7687,7 @@
           <a:lstStyle/>
           <a:p>
             <a:pPr algn="ctr"/>
+            <a:endParaRPr/>
           </a:p>
         </p:txBody>
       </p:sp>
@@ -7859,6 +7801,7 @@
           <a:lstStyle/>
           <a:p>
             <a:pPr algn="ctr"/>
+            <a:endParaRPr/>
           </a:p>
         </p:txBody>
       </p:sp>
@@ -7938,6 +7881,7 @@
           <a:lstStyle/>
           <a:p>
             <a:pPr algn="ctr"/>
+            <a:endParaRPr/>
           </a:p>
         </p:txBody>
       </p:sp>
@@ -7981,6 +7925,7 @@
           <a:lstStyle/>
           <a:p>
             <a:pPr algn="ctr"/>
+            <a:endParaRPr/>
           </a:p>
         </p:txBody>
       </p:sp>
@@ -8094,6 +8039,7 @@
           <a:lstStyle/>
           <a:p>
             <a:pPr algn="ctr"/>
+            <a:endParaRPr/>
           </a:p>
         </p:txBody>
       </p:sp>
@@ -8173,6 +8119,7 @@
           <a:lstStyle/>
           <a:p>
             <a:pPr algn="ctr"/>
+            <a:endParaRPr/>
           </a:p>
         </p:txBody>
       </p:sp>
@@ -8216,6 +8163,7 @@
           <a:lstStyle/>
           <a:p>
             <a:pPr algn="ctr"/>
+            <a:endParaRPr/>
           </a:p>
         </p:txBody>
       </p:sp>
@@ -8329,6 +8277,7 @@
           <a:lstStyle/>
           <a:p>
             <a:pPr algn="ctr"/>
+            <a:endParaRPr/>
           </a:p>
         </p:txBody>
       </p:sp>
@@ -8408,6 +8357,7 @@
           <a:lstStyle/>
           <a:p>
             <a:pPr algn="ctr"/>
+            <a:endParaRPr/>
           </a:p>
         </p:txBody>
       </p:sp>
@@ -8451,6 +8401,7 @@
           <a:lstStyle/>
           <a:p>
             <a:pPr algn="ctr"/>
+            <a:endParaRPr/>
           </a:p>
         </p:txBody>
       </p:sp>
@@ -8564,6 +8515,7 @@
           <a:lstStyle/>
           <a:p>
             <a:pPr algn="ctr"/>
+            <a:endParaRPr/>
           </a:p>
         </p:txBody>
       </p:sp>
@@ -8612,7 +8564,7 @@
 </file>
 
 <file path=ppt/slides/slide13.xml><?xml version="1.0" encoding="utf-8"?>
-<p:sld xmlns:a="http://schemas.openxmlformats.org/drawingml/2006/main" xmlns:p="http://schemas.openxmlformats.org/presentationml/2006/main" xmlns:r="http://schemas.openxmlformats.org/officeDocument/2006/relationships">
+<p:sld xmlns:a="http://schemas.openxmlformats.org/drawingml/2006/main" xmlns:r="http://schemas.openxmlformats.org/officeDocument/2006/relationships" xmlns:p="http://schemas.openxmlformats.org/presentationml/2006/main">
   <p:cSld>
     <p:bg>
       <p:bgPr>
@@ -8628,7 +8580,14 @@
         <p:cNvGrpSpPr/>
         <p:nvPr/>
       </p:nvGrpSpPr>
-      <p:grpSpPr/>
+      <p:grpSpPr>
+        <a:xfrm>
+          <a:off x="0" y="0"/>
+          <a:ext cx="0" cy="0"/>
+          <a:chOff x="0" y="0"/>
+          <a:chExt cx="0" cy="0"/>
+        </a:xfrm>
+      </p:grpSpPr>
       <p:sp>
         <p:nvSpPr>
           <p:cNvPr id="2" name="Rectangle 1"/>
@@ -8669,6 +8628,7 @@
           <a:lstStyle/>
           <a:p>
             <a:pPr algn="ctr"/>
+            <a:endParaRPr/>
           </a:p>
         </p:txBody>
       </p:sp>
@@ -8712,6 +8672,7 @@
           <a:lstStyle/>
           <a:p>
             <a:pPr algn="ctr"/>
+            <a:endParaRPr/>
           </a:p>
         </p:txBody>
       </p:sp>
@@ -8755,6 +8716,7 @@
           <a:lstStyle/>
           <a:p>
             <a:pPr algn="ctr"/>
+            <a:endParaRPr/>
           </a:p>
         </p:txBody>
       </p:sp>
@@ -8912,6 +8874,7 @@
           <a:lstStyle/>
           <a:p>
             <a:pPr algn="ctr"/>
+            <a:endParaRPr/>
           </a:p>
         </p:txBody>
       </p:sp>
@@ -8955,6 +8918,7 @@
           <a:lstStyle/>
           <a:p>
             <a:pPr algn="ctr"/>
+            <a:endParaRPr/>
           </a:p>
         </p:txBody>
       </p:sp>
@@ -9068,6 +9032,7 @@
           <a:lstStyle/>
           <a:p>
             <a:pPr algn="ctr"/>
+            <a:endParaRPr/>
           </a:p>
         </p:txBody>
       </p:sp>
@@ -9147,6 +9112,7 @@
           <a:lstStyle/>
           <a:p>
             <a:pPr algn="ctr"/>
+            <a:endParaRPr/>
           </a:p>
         </p:txBody>
       </p:sp>
@@ -9260,6 +9226,7 @@
           <a:lstStyle/>
           <a:p>
             <a:pPr algn="ctr"/>
+            <a:endParaRPr/>
           </a:p>
         </p:txBody>
       </p:sp>
@@ -9339,6 +9306,7 @@
           <a:lstStyle/>
           <a:p>
             <a:pPr algn="ctr"/>
+            <a:endParaRPr/>
           </a:p>
         </p:txBody>
       </p:sp>
@@ -9452,6 +9420,7 @@
           <a:lstStyle/>
           <a:p>
             <a:pPr algn="ctr"/>
+            <a:endParaRPr/>
           </a:p>
         </p:txBody>
       </p:sp>
@@ -9535,7 +9504,7 @@
 </file>
 
 <file path=ppt/slides/slide2.xml><?xml version="1.0" encoding="utf-8"?>
-<p:sld xmlns:a="http://schemas.openxmlformats.org/drawingml/2006/main" xmlns:p="http://schemas.openxmlformats.org/presentationml/2006/main" xmlns:r="http://schemas.openxmlformats.org/officeDocument/2006/relationships">
+<p:sld xmlns:a="http://schemas.openxmlformats.org/drawingml/2006/main" xmlns:r="http://schemas.openxmlformats.org/officeDocument/2006/relationships" xmlns:p="http://schemas.openxmlformats.org/presentationml/2006/main">
   <p:cSld>
     <p:bg>
       <p:bgPr>
@@ -9551,7 +9520,14 @@
         <p:cNvGrpSpPr/>
         <p:nvPr/>
       </p:nvGrpSpPr>
-      <p:grpSpPr/>
+      <p:grpSpPr>
+        <a:xfrm>
+          <a:off x="0" y="0"/>
+          <a:ext cx="0" cy="0"/>
+          <a:chOff x="0" y="0"/>
+          <a:chExt cx="0" cy="0"/>
+        </a:xfrm>
+      </p:grpSpPr>
       <p:sp>
         <p:nvSpPr>
           <p:cNvPr id="2" name="Rectangle 1"/>
@@ -9592,6 +9568,7 @@
           <a:lstStyle/>
           <a:p>
             <a:pPr algn="ctr"/>
+            <a:endParaRPr/>
           </a:p>
         </p:txBody>
       </p:sp>
@@ -9635,6 +9612,7 @@
           <a:lstStyle/>
           <a:p>
             <a:pPr algn="ctr"/>
+            <a:endParaRPr/>
           </a:p>
         </p:txBody>
       </p:sp>
@@ -9748,6 +9726,7 @@
           <a:lstStyle/>
           <a:p>
             <a:pPr algn="ctr"/>
+            <a:endParaRPr/>
           </a:p>
         </p:txBody>
       </p:sp>
@@ -9791,6 +9770,7 @@
           <a:lstStyle/>
           <a:p>
             <a:pPr algn="ctr"/>
+            <a:endParaRPr/>
           </a:p>
         </p:txBody>
       </p:sp>
@@ -9869,6 +9849,7 @@
           <a:lstStyle/>
           <a:p>
             <a:pPr algn="ctr"/>
+            <a:endParaRPr/>
           </a:p>
         </p:txBody>
       </p:sp>
@@ -9948,6 +9929,7 @@
           <a:lstStyle/>
           <a:p>
             <a:pPr algn="ctr"/>
+            <a:endParaRPr/>
           </a:p>
         </p:txBody>
       </p:sp>
@@ -10026,6 +10008,7 @@
           <a:lstStyle/>
           <a:p>
             <a:pPr algn="ctr"/>
+            <a:endParaRPr/>
           </a:p>
         </p:txBody>
       </p:sp>
@@ -10105,6 +10088,7 @@
           <a:lstStyle/>
           <a:p>
             <a:pPr algn="ctr"/>
+            <a:endParaRPr/>
           </a:p>
         </p:txBody>
       </p:sp>
@@ -10183,6 +10167,7 @@
           <a:lstStyle/>
           <a:p>
             <a:pPr algn="ctr"/>
+            <a:endParaRPr/>
           </a:p>
         </p:txBody>
       </p:sp>
@@ -10274,7 +10259,7 @@
 </file>
 
 <file path=ppt/slides/slide3.xml><?xml version="1.0" encoding="utf-8"?>
-<p:sld xmlns:a="http://schemas.openxmlformats.org/drawingml/2006/main" xmlns:p="http://schemas.openxmlformats.org/presentationml/2006/main" xmlns:r="http://schemas.openxmlformats.org/officeDocument/2006/relationships">
+<p:sld xmlns:a="http://schemas.openxmlformats.org/drawingml/2006/main" xmlns:r="http://schemas.openxmlformats.org/officeDocument/2006/relationships" xmlns:p="http://schemas.openxmlformats.org/presentationml/2006/main">
   <p:cSld>
     <p:bg>
       <p:bgPr>
@@ -10290,7 +10275,14 @@
         <p:cNvGrpSpPr/>
         <p:nvPr/>
       </p:nvGrpSpPr>
-      <p:grpSpPr/>
+      <p:grpSpPr>
+        <a:xfrm>
+          <a:off x="0" y="0"/>
+          <a:ext cx="0" cy="0"/>
+          <a:chOff x="0" y="0"/>
+          <a:chExt cx="0" cy="0"/>
+        </a:xfrm>
+      </p:grpSpPr>
       <p:sp>
         <p:nvSpPr>
           <p:cNvPr id="2" name="Rectangle 1"/>
@@ -10331,6 +10323,7 @@
           <a:lstStyle/>
           <a:p>
             <a:pPr algn="ctr"/>
+            <a:endParaRPr/>
           </a:p>
         </p:txBody>
       </p:sp>
@@ -10409,6 +10402,7 @@
           <a:lstStyle/>
           <a:p>
             <a:pPr algn="ctr"/>
+            <a:endParaRPr/>
           </a:p>
         </p:txBody>
       </p:sp>
@@ -10452,6 +10446,7 @@
           <a:lstStyle/>
           <a:p>
             <a:pPr algn="ctr"/>
+            <a:endParaRPr/>
           </a:p>
         </p:txBody>
       </p:sp>
@@ -10495,6 +10490,7 @@
           <a:lstStyle/>
           <a:p>
             <a:pPr algn="ctr"/>
+            <a:endParaRPr/>
           </a:p>
         </p:txBody>
       </p:sp>
@@ -10575,6 +10571,7 @@
           <a:lstStyle/>
           <a:p>
             <a:pPr algn="ctr"/>
+            <a:endParaRPr/>
           </a:p>
         </p:txBody>
       </p:sp>
@@ -10618,6 +10615,7 @@
           <a:lstStyle/>
           <a:p>
             <a:pPr algn="ctr"/>
+            <a:endParaRPr/>
           </a:p>
         </p:txBody>
       </p:sp>
@@ -10698,6 +10696,7 @@
           <a:lstStyle/>
           <a:p>
             <a:pPr algn="ctr"/>
+            <a:endParaRPr/>
           </a:p>
         </p:txBody>
       </p:sp>
@@ -10741,6 +10740,7 @@
           <a:lstStyle/>
           <a:p>
             <a:pPr algn="ctr"/>
+            <a:endParaRPr/>
           </a:p>
         </p:txBody>
       </p:sp>
@@ -10926,6 +10926,7 @@
           <a:lstStyle/>
           <a:p>
             <a:pPr algn="ctr"/>
+            <a:endParaRPr/>
           </a:p>
         </p:txBody>
       </p:sp>
@@ -11004,6 +11005,7 @@
           <a:lstStyle/>
           <a:p>
             <a:pPr algn="ctr"/>
+            <a:endParaRPr/>
           </a:p>
         </p:txBody>
       </p:sp>
@@ -11082,6 +11084,7 @@
           <a:lstStyle/>
           <a:p>
             <a:pPr algn="ctr"/>
+            <a:endParaRPr/>
           </a:p>
         </p:txBody>
       </p:sp>
@@ -11172,7 +11175,7 @@
 </file>
 
 <file path=ppt/slides/slide4.xml><?xml version="1.0" encoding="utf-8"?>
-<p:sld xmlns:a="http://schemas.openxmlformats.org/drawingml/2006/main" xmlns:p="http://schemas.openxmlformats.org/presentationml/2006/main" xmlns:r="http://schemas.openxmlformats.org/officeDocument/2006/relationships">
+<p:sld xmlns:a="http://schemas.openxmlformats.org/drawingml/2006/main" xmlns:r="http://schemas.openxmlformats.org/officeDocument/2006/relationships" xmlns:p="http://schemas.openxmlformats.org/presentationml/2006/main">
   <p:cSld>
     <p:bg>
       <p:bgPr>
@@ -11188,7 +11191,14 @@
         <p:cNvGrpSpPr/>
         <p:nvPr/>
       </p:nvGrpSpPr>
-      <p:grpSpPr/>
+      <p:grpSpPr>
+        <a:xfrm>
+          <a:off x="0" y="0"/>
+          <a:ext cx="0" cy="0"/>
+          <a:chOff x="0" y="0"/>
+          <a:chExt cx="0" cy="0"/>
+        </a:xfrm>
+      </p:grpSpPr>
       <p:sp>
         <p:nvSpPr>
           <p:cNvPr id="2" name="Rectangle 1"/>
@@ -11229,6 +11239,7 @@
           <a:lstStyle/>
           <a:p>
             <a:pPr algn="ctr"/>
+            <a:endParaRPr/>
           </a:p>
         </p:txBody>
       </p:sp>
@@ -11308,6 +11319,7 @@
           <a:lstStyle/>
           <a:p>
             <a:pPr algn="ctr"/>
+            <a:endParaRPr/>
           </a:p>
         </p:txBody>
       </p:sp>
@@ -11399,7 +11411,7 @@
 </file>
 
 <file path=ppt/slides/slide5.xml><?xml version="1.0" encoding="utf-8"?>
-<p:sld xmlns:a="http://schemas.openxmlformats.org/drawingml/2006/main" xmlns:p="http://schemas.openxmlformats.org/presentationml/2006/main" xmlns:r="http://schemas.openxmlformats.org/officeDocument/2006/relationships">
+<p:sld xmlns:a="http://schemas.openxmlformats.org/drawingml/2006/main" xmlns:r="http://schemas.openxmlformats.org/officeDocument/2006/relationships" xmlns:p="http://schemas.openxmlformats.org/presentationml/2006/main">
   <p:cSld>
     <p:bg>
       <p:bgPr>
@@ -11415,7 +11427,14 @@
         <p:cNvGrpSpPr/>
         <p:nvPr/>
       </p:nvGrpSpPr>
-      <p:grpSpPr/>
+      <p:grpSpPr>
+        <a:xfrm>
+          <a:off x="0" y="0"/>
+          <a:ext cx="0" cy="0"/>
+          <a:chOff x="0" y="0"/>
+          <a:chExt cx="0" cy="0"/>
+        </a:xfrm>
+      </p:grpSpPr>
       <p:sp>
         <p:nvSpPr>
           <p:cNvPr id="2" name="Rectangle 1"/>
@@ -11456,6 +11475,7 @@
           <a:lstStyle/>
           <a:p>
             <a:pPr algn="ctr"/>
+            <a:endParaRPr/>
           </a:p>
         </p:txBody>
       </p:sp>
@@ -11499,6 +11519,7 @@
           <a:lstStyle/>
           <a:p>
             <a:pPr algn="ctr"/>
+            <a:endParaRPr/>
           </a:p>
         </p:txBody>
       </p:sp>
@@ -11656,6 +11677,7 @@
           <a:lstStyle/>
           <a:p>
             <a:pPr algn="ctr"/>
+            <a:endParaRPr/>
           </a:p>
         </p:txBody>
       </p:sp>
@@ -11769,6 +11791,7 @@
           <a:lstStyle/>
           <a:p>
             <a:pPr algn="ctr"/>
+            <a:endParaRPr/>
           </a:p>
         </p:txBody>
       </p:sp>
@@ -11848,6 +11871,7 @@
           <a:lstStyle/>
           <a:p>
             <a:pPr algn="ctr"/>
+            <a:endParaRPr/>
           </a:p>
         </p:txBody>
       </p:sp>
@@ -11961,6 +11985,7 @@
           <a:lstStyle/>
           <a:p>
             <a:pPr algn="ctr"/>
+            <a:endParaRPr/>
           </a:p>
         </p:txBody>
       </p:sp>
@@ -12040,6 +12065,7 @@
           <a:lstStyle/>
           <a:p>
             <a:pPr algn="ctr"/>
+            <a:endParaRPr/>
           </a:p>
         </p:txBody>
       </p:sp>
@@ -12153,6 +12179,7 @@
           <a:lstStyle/>
           <a:p>
             <a:pPr algn="ctr"/>
+            <a:endParaRPr/>
           </a:p>
         </p:txBody>
       </p:sp>
@@ -12232,6 +12259,7 @@
           <a:lstStyle/>
           <a:p>
             <a:pPr algn="ctr"/>
+            <a:endParaRPr/>
           </a:p>
         </p:txBody>
       </p:sp>
@@ -12345,6 +12373,7 @@
           <a:lstStyle/>
           <a:p>
             <a:pPr algn="ctr"/>
+            <a:endParaRPr/>
           </a:p>
         </p:txBody>
       </p:sp>
@@ -12424,6 +12453,7 @@
           <a:lstStyle/>
           <a:p>
             <a:pPr algn="ctr"/>
+            <a:endParaRPr/>
           </a:p>
         </p:txBody>
       </p:sp>
@@ -12537,6 +12567,7 @@
           <a:lstStyle/>
           <a:p>
             <a:pPr algn="ctr"/>
+            <a:endParaRPr/>
           </a:p>
         </p:txBody>
       </p:sp>
@@ -12585,7 +12616,7 @@
 </file>
 
 <file path=ppt/slides/slide6.xml><?xml version="1.0" encoding="utf-8"?>
-<p:sld xmlns:a="http://schemas.openxmlformats.org/drawingml/2006/main" xmlns:p="http://schemas.openxmlformats.org/presentationml/2006/main" xmlns:r="http://schemas.openxmlformats.org/officeDocument/2006/relationships">
+<p:sld xmlns:a="http://schemas.openxmlformats.org/drawingml/2006/main" xmlns:r="http://schemas.openxmlformats.org/officeDocument/2006/relationships" xmlns:p="http://schemas.openxmlformats.org/presentationml/2006/main">
   <p:cSld>
     <p:bg>
       <p:bgPr>
@@ -12601,7 +12632,14 @@
         <p:cNvGrpSpPr/>
         <p:nvPr/>
       </p:nvGrpSpPr>
-      <p:grpSpPr/>
+      <p:grpSpPr>
+        <a:xfrm>
+          <a:off x="0" y="0"/>
+          <a:ext cx="0" cy="0"/>
+          <a:chOff x="0" y="0"/>
+          <a:chExt cx="0" cy="0"/>
+        </a:xfrm>
+      </p:grpSpPr>
       <p:sp>
         <p:nvSpPr>
           <p:cNvPr id="2" name="Rectangle 1"/>
@@ -12642,6 +12680,7 @@
           <a:lstStyle/>
           <a:p>
             <a:pPr algn="ctr"/>
+            <a:endParaRPr/>
           </a:p>
         </p:txBody>
       </p:sp>
@@ -12685,6 +12724,7 @@
           <a:lstStyle/>
           <a:p>
             <a:pPr algn="ctr"/>
+            <a:endParaRPr/>
           </a:p>
         </p:txBody>
       </p:sp>
@@ -12763,6 +12803,7 @@
           <a:lstStyle/>
           <a:p>
             <a:pPr algn="ctr"/>
+            <a:endParaRPr/>
           </a:p>
         </p:txBody>
       </p:sp>
@@ -12877,6 +12918,7 @@
           <a:lstStyle/>
           <a:p>
             <a:pPr algn="ctr"/>
+            <a:endParaRPr/>
           </a:p>
         </p:txBody>
       </p:sp>
@@ -12992,6 +13034,7 @@
           <a:lstStyle/>
           <a:p>
             <a:pPr algn="ctr"/>
+            <a:endParaRPr/>
           </a:p>
         </p:txBody>
       </p:sp>
@@ -13106,6 +13149,7 @@
           <a:lstStyle/>
           <a:p>
             <a:pPr algn="ctr"/>
+            <a:endParaRPr/>
           </a:p>
         </p:txBody>
       </p:sp>
@@ -13223,6 +13267,7 @@
           <a:lstStyle/>
           <a:p>
             <a:pPr algn="ctr"/>
+            <a:endParaRPr/>
           </a:p>
         </p:txBody>
       </p:sp>
@@ -13337,6 +13382,7 @@
           <a:lstStyle/>
           <a:p>
             <a:pPr algn="ctr"/>
+            <a:endParaRPr/>
           </a:p>
         </p:txBody>
       </p:sp>
@@ -13417,6 +13463,7 @@
           <a:lstStyle/>
           <a:p>
             <a:pPr algn="ctr"/>
+            <a:endParaRPr/>
           </a:p>
         </p:txBody>
       </p:sp>
@@ -13464,7 +13511,7 @@
 </file>
 
 <file path=ppt/slides/slide7.xml><?xml version="1.0" encoding="utf-8"?>
-<p:sld xmlns:a="http://schemas.openxmlformats.org/drawingml/2006/main" xmlns:p="http://schemas.openxmlformats.org/presentationml/2006/main" xmlns:r="http://schemas.openxmlformats.org/officeDocument/2006/relationships">
+<p:sld xmlns:a="http://schemas.openxmlformats.org/drawingml/2006/main" xmlns:r="http://schemas.openxmlformats.org/officeDocument/2006/relationships" xmlns:p="http://schemas.openxmlformats.org/presentationml/2006/main">
   <p:cSld>
     <p:bg>
       <p:bgPr>
@@ -13480,7 +13527,14 @@
         <p:cNvGrpSpPr/>
         <p:nvPr/>
       </p:nvGrpSpPr>
-      <p:grpSpPr/>
+      <p:grpSpPr>
+        <a:xfrm>
+          <a:off x="0" y="0"/>
+          <a:ext cx="0" cy="0"/>
+          <a:chOff x="0" y="0"/>
+          <a:chExt cx="0" cy="0"/>
+        </a:xfrm>
+      </p:grpSpPr>
       <p:sp>
         <p:nvSpPr>
           <p:cNvPr id="2" name="Rectangle 1"/>
@@ -13521,6 +13575,7 @@
           <a:lstStyle/>
           <a:p>
             <a:pPr algn="ctr"/>
+            <a:endParaRPr/>
           </a:p>
         </p:txBody>
       </p:sp>
@@ -13599,6 +13654,7 @@
           <a:lstStyle/>
           <a:p>
             <a:pPr algn="ctr"/>
+            <a:endParaRPr/>
           </a:p>
         </p:txBody>
       </p:sp>
@@ -13642,6 +13698,7 @@
           <a:lstStyle/>
           <a:p>
             <a:pPr algn="ctr"/>
+            <a:endParaRPr/>
           </a:p>
         </p:txBody>
       </p:sp>
@@ -13685,6 +13742,7 @@
           <a:lstStyle/>
           <a:p>
             <a:pPr algn="ctr"/>
+            <a:endParaRPr/>
           </a:p>
         </p:txBody>
       </p:sp>
@@ -13798,6 +13856,7 @@
           <a:lstStyle/>
           <a:p>
             <a:pPr algn="ctr"/>
+            <a:endParaRPr/>
           </a:p>
         </p:txBody>
       </p:sp>
@@ -13877,6 +13936,7 @@
           <a:lstStyle/>
           <a:p>
             <a:pPr algn="ctr"/>
+            <a:endParaRPr/>
           </a:p>
         </p:txBody>
       </p:sp>
@@ -13920,6 +13980,7 @@
           <a:lstStyle/>
           <a:p>
             <a:pPr algn="ctr"/>
+            <a:endParaRPr/>
           </a:p>
         </p:txBody>
       </p:sp>
@@ -14033,6 +14094,7 @@
           <a:lstStyle/>
           <a:p>
             <a:pPr algn="ctr"/>
+            <a:endParaRPr/>
           </a:p>
         </p:txBody>
       </p:sp>
@@ -14112,6 +14174,7 @@
           <a:lstStyle/>
           <a:p>
             <a:pPr algn="ctr"/>
+            <a:endParaRPr/>
           </a:p>
         </p:txBody>
       </p:sp>
@@ -14155,6 +14218,7 @@
           <a:lstStyle/>
           <a:p>
             <a:pPr algn="ctr"/>
+            <a:endParaRPr/>
           </a:p>
         </p:txBody>
       </p:sp>
@@ -14268,6 +14332,7 @@
           <a:lstStyle/>
           <a:p>
             <a:pPr algn="ctr"/>
+            <a:endParaRPr/>
           </a:p>
         </p:txBody>
       </p:sp>
@@ -14347,6 +14412,7 @@
           <a:lstStyle/>
           <a:p>
             <a:pPr algn="ctr"/>
+            <a:endParaRPr/>
           </a:p>
         </p:txBody>
       </p:sp>
@@ -14390,6 +14456,7 @@
           <a:lstStyle/>
           <a:p>
             <a:pPr algn="ctr"/>
+            <a:endParaRPr/>
           </a:p>
         </p:txBody>
       </p:sp>
@@ -14503,6 +14570,7 @@
           <a:lstStyle/>
           <a:p>
             <a:pPr algn="ctr"/>
+            <a:endParaRPr/>
           </a:p>
         </p:txBody>
       </p:sp>
@@ -14586,7 +14654,7 @@
 </file>
 
 <file path=ppt/slides/slide8.xml><?xml version="1.0" encoding="utf-8"?>
-<p:sld xmlns:a="http://schemas.openxmlformats.org/drawingml/2006/main" xmlns:p="http://schemas.openxmlformats.org/presentationml/2006/main" xmlns:r="http://schemas.openxmlformats.org/officeDocument/2006/relationships">
+<p:sld xmlns:a="http://schemas.openxmlformats.org/drawingml/2006/main" xmlns:r="http://schemas.openxmlformats.org/officeDocument/2006/relationships" xmlns:p="http://schemas.openxmlformats.org/presentationml/2006/main">
   <p:cSld>
     <p:bg>
       <p:bgPr>
@@ -14602,7 +14670,14 @@
         <p:cNvGrpSpPr/>
         <p:nvPr/>
       </p:nvGrpSpPr>
-      <p:grpSpPr/>
+      <p:grpSpPr>
+        <a:xfrm>
+          <a:off x="0" y="0"/>
+          <a:ext cx="0" cy="0"/>
+          <a:chOff x="0" y="0"/>
+          <a:chExt cx="0" cy="0"/>
+        </a:xfrm>
+      </p:grpSpPr>
       <p:sp>
         <p:nvSpPr>
           <p:cNvPr id="2" name="Rectangle 1"/>
@@ -14643,6 +14718,7 @@
           <a:lstStyle/>
           <a:p>
             <a:pPr algn="ctr"/>
+            <a:endParaRPr/>
           </a:p>
         </p:txBody>
       </p:sp>
@@ -14686,6 +14762,7 @@
           <a:lstStyle/>
           <a:p>
             <a:pPr algn="ctr"/>
+            <a:endParaRPr/>
           </a:p>
         </p:txBody>
       </p:sp>
@@ -14764,6 +14841,7 @@
           <a:lstStyle/>
           <a:p>
             <a:pPr algn="ctr"/>
+            <a:endParaRPr/>
           </a:p>
         </p:txBody>
       </p:sp>
@@ -14807,6 +14885,7 @@
           <a:lstStyle/>
           <a:p>
             <a:pPr algn="ctr"/>
+            <a:endParaRPr/>
           </a:p>
         </p:txBody>
       </p:sp>
@@ -14850,6 +14929,7 @@
           <a:lstStyle/>
           <a:p>
             <a:pPr algn="ctr"/>
+            <a:endParaRPr/>
           </a:p>
         </p:txBody>
       </p:sp>
@@ -14963,6 +15043,7 @@
           <a:lstStyle/>
           <a:p>
             <a:pPr algn="ctr"/>
+            <a:endParaRPr/>
           </a:p>
         </p:txBody>
       </p:sp>
@@ -15146,6 +15227,7 @@
           <a:lstStyle/>
           <a:p>
             <a:pPr algn="ctr"/>
+            <a:endParaRPr/>
           </a:p>
         </p:txBody>
       </p:sp>
@@ -15224,6 +15306,7 @@
           <a:lstStyle/>
           <a:p>
             <a:pPr algn="ctr"/>
+            <a:endParaRPr/>
           </a:p>
         </p:txBody>
       </p:sp>
@@ -15267,6 +15350,7 @@
           <a:lstStyle/>
           <a:p>
             <a:pPr algn="ctr"/>
+            <a:endParaRPr/>
           </a:p>
         </p:txBody>
       </p:sp>
@@ -15310,6 +15394,7 @@
           <a:lstStyle/>
           <a:p>
             <a:pPr algn="ctr"/>
+            <a:endParaRPr/>
           </a:p>
         </p:txBody>
       </p:sp>
@@ -15423,6 +15508,7 @@
           <a:lstStyle/>
           <a:p>
             <a:pPr algn="ctr"/>
+            <a:endParaRPr/>
           </a:p>
         </p:txBody>
       </p:sp>
@@ -15606,6 +15692,7 @@
           <a:lstStyle/>
           <a:p>
             <a:pPr algn="ctr"/>
+            <a:endParaRPr/>
           </a:p>
         </p:txBody>
       </p:sp>
@@ -15684,6 +15771,7 @@
           <a:lstStyle/>
           <a:p>
             <a:pPr algn="ctr"/>
+            <a:endParaRPr/>
           </a:p>
         </p:txBody>
       </p:sp>
@@ -15727,6 +15815,7 @@
           <a:lstStyle/>
           <a:p>
             <a:pPr algn="ctr"/>
+            <a:endParaRPr/>
           </a:p>
         </p:txBody>
       </p:sp>
@@ -15770,6 +15859,7 @@
           <a:lstStyle/>
           <a:p>
             <a:pPr algn="ctr"/>
+            <a:endParaRPr/>
           </a:p>
         </p:txBody>
       </p:sp>
@@ -15883,6 +15973,7 @@
           <a:lstStyle/>
           <a:p>
             <a:pPr algn="ctr"/>
+            <a:endParaRPr/>
           </a:p>
         </p:txBody>
       </p:sp>
@@ -16066,6 +16157,7 @@
           <a:lstStyle/>
           <a:p>
             <a:pPr algn="ctr"/>
+            <a:endParaRPr/>
           </a:p>
         </p:txBody>
       </p:sp>
@@ -16148,7 +16240,7 @@
 </file>
 
 <file path=ppt/slides/slide9.xml><?xml version="1.0" encoding="utf-8"?>
-<p:sld xmlns:a="http://schemas.openxmlformats.org/drawingml/2006/main" xmlns:p="http://schemas.openxmlformats.org/presentationml/2006/main" xmlns:r="http://schemas.openxmlformats.org/officeDocument/2006/relationships">
+<p:sld xmlns:a="http://schemas.openxmlformats.org/drawingml/2006/main" xmlns:r="http://schemas.openxmlformats.org/officeDocument/2006/relationships" xmlns:p="http://schemas.openxmlformats.org/presentationml/2006/main">
   <p:cSld>
     <p:bg>
       <p:bgPr>
@@ -16164,7 +16256,14 @@
         <p:cNvGrpSpPr/>
         <p:nvPr/>
       </p:nvGrpSpPr>
-      <p:grpSpPr/>
+      <p:grpSpPr>
+        <a:xfrm>
+          <a:off x="0" y="0"/>
+          <a:ext cx="0" cy="0"/>
+          <a:chOff x="0" y="0"/>
+          <a:chExt cx="0" cy="0"/>
+        </a:xfrm>
+      </p:grpSpPr>
       <p:sp>
         <p:nvSpPr>
           <p:cNvPr id="2" name="Rectangle 1"/>
@@ -16205,6 +16304,7 @@
           <a:lstStyle/>
           <a:p>
             <a:pPr algn="ctr"/>
+            <a:endParaRPr/>
           </a:p>
         </p:txBody>
       </p:sp>
@@ -16248,6 +16348,7 @@
           <a:lstStyle/>
           <a:p>
             <a:pPr algn="ctr"/>
+            <a:endParaRPr/>
           </a:p>
         </p:txBody>
       </p:sp>
@@ -16361,6 +16462,7 @@
           <a:lstStyle/>
           <a:p>
             <a:pPr algn="ctr"/>
+            <a:endParaRPr/>
           </a:p>
         </p:txBody>
       </p:sp>
@@ -16474,6 +16576,7 @@
           <a:lstStyle/>
           <a:p>
             <a:pPr algn="ctr"/>
+            <a:endParaRPr/>
           </a:p>
         </p:txBody>
       </p:sp>
@@ -16587,6 +16690,7 @@
           <a:lstStyle/>
           <a:p>
             <a:pPr algn="ctr"/>
+            <a:endParaRPr/>
           </a:p>
         </p:txBody>
       </p:sp>
@@ -16700,6 +16804,7 @@
           <a:lstStyle/>
           <a:p>
             <a:pPr algn="ctr"/>
+            <a:endParaRPr/>
           </a:p>
         </p:txBody>
       </p:sp>
@@ -16813,6 +16918,7 @@
           <a:lstStyle/>
           <a:p>
             <a:pPr algn="ctr"/>
+            <a:endParaRPr/>
           </a:p>
         </p:txBody>
       </p:sp>
@@ -16961,6 +17067,7 @@
           <a:lstStyle/>
           <a:p>
             <a:pPr algn="ctr"/>
+            <a:endParaRPr/>
           </a:p>
         </p:txBody>
       </p:sp>
@@ -17074,6 +17181,7 @@
           <a:lstStyle/>
           <a:p>
             <a:pPr algn="ctr"/>
+            <a:endParaRPr/>
           </a:p>
         </p:txBody>
       </p:sp>
@@ -17521,44 +17629,44 @@
         <a:sysClr val="window" lastClr="FFFFFF"/>
       </a:lt1>
       <a:dk2>
-        <a:srgbClr val="1F497D"/>
+        <a:srgbClr val="0E2841"/>
       </a:dk2>
       <a:lt2>
-        <a:srgbClr val="EEECE1"/>
+        <a:srgbClr val="E8E8E8"/>
       </a:lt2>
       <a:accent1>
-        <a:srgbClr val="4F81BD"/>
+        <a:srgbClr val="156082"/>
       </a:accent1>
       <a:accent2>
-        <a:srgbClr val="C0504D"/>
+        <a:srgbClr val="E97132"/>
       </a:accent2>
       <a:accent3>
-        <a:srgbClr val="9BBB59"/>
+        <a:srgbClr val="196B24"/>
       </a:accent3>
       <a:accent4>
-        <a:srgbClr val="8064A2"/>
+        <a:srgbClr val="0F9ED5"/>
       </a:accent4>
       <a:accent5>
-        <a:srgbClr val="4BACC6"/>
+        <a:srgbClr val="A02B93"/>
       </a:accent5>
       <a:accent6>
-        <a:srgbClr val="F79646"/>
+        <a:srgbClr val="4EA72E"/>
       </a:accent6>
       <a:hlink>
-        <a:srgbClr val="0000FF"/>
+        <a:srgbClr val="467886"/>
       </a:hlink>
       <a:folHlink>
-        <a:srgbClr val="800080"/>
+        <a:srgbClr val="96607D"/>
       </a:folHlink>
     </a:clrScheme>
     <a:fontScheme name="Office">
       <a:majorFont>
-        <a:latin typeface="Calibri"/>
+        <a:latin typeface="Aptos Display" panose="02110004020202020204"/>
         <a:ea typeface=""/>
         <a:cs typeface=""/>
-        <a:font script="Jpan" typeface="ＭＳ Ｐゴシック"/>
+        <a:font script="Jpan" typeface="游ゴシック Light"/>
         <a:font script="Hang" typeface="맑은 고딕"/>
-        <a:font script="Hans" typeface="宋体"/>
+        <a:font script="Hans" typeface="等线 Light"/>
         <a:font script="Hant" typeface="新細明體"/>
         <a:font script="Arab" typeface="Times New Roman"/>
         <a:font script="Hebr" typeface="Times New Roman"/>
@@ -17586,14 +17694,31 @@
         <a:font script="Viet" typeface="Times New Roman"/>
         <a:font script="Uigh" typeface="Microsoft Uighur"/>
         <a:font script="Geor" typeface="Sylfaen"/>
+        <a:font script="Armn" typeface="Arial"/>
+        <a:font script="Bugi" typeface="Leelawadee UI"/>
+        <a:font script="Bopo" typeface="Microsoft JhengHei"/>
+        <a:font script="Java" typeface="Javanese Text"/>
+        <a:font script="Lisu" typeface="Segoe UI"/>
+        <a:font script="Mymr" typeface="Myanmar Text"/>
+        <a:font script="Nkoo" typeface="Ebrima"/>
+        <a:font script="Olck" typeface="Nirmala UI"/>
+        <a:font script="Osma" typeface="Ebrima"/>
+        <a:font script="Phag" typeface="Phagspa"/>
+        <a:font script="Syrn" typeface="Estrangelo Edessa"/>
+        <a:font script="Syrj" typeface="Estrangelo Edessa"/>
+        <a:font script="Syre" typeface="Estrangelo Edessa"/>
+        <a:font script="Sora" typeface="Nirmala UI"/>
+        <a:font script="Tale" typeface="Microsoft Tai Le"/>
+        <a:font script="Talu" typeface="Microsoft New Tai Lue"/>
+        <a:font script="Tfng" typeface="Ebrima"/>
       </a:majorFont>
       <a:minorFont>
-        <a:latin typeface="Calibri"/>
+        <a:latin typeface="Aptos" panose="02110004020202020204"/>
         <a:ea typeface=""/>
         <a:cs typeface=""/>
-        <a:font script="Jpan" typeface="ＭＳ Ｐゴシック"/>
+        <a:font script="Jpan" typeface="游ゴシック"/>
         <a:font script="Hang" typeface="맑은 고딕"/>
-        <a:font script="Hans" typeface="宋体"/>
+        <a:font script="Hans" typeface="等线"/>
         <a:font script="Hant" typeface="新細明體"/>
         <a:font script="Arab" typeface="Arial"/>
         <a:font script="Hebr" typeface="Arial"/>
@@ -17621,6 +17746,23 @@
         <a:font script="Viet" typeface="Arial"/>
         <a:font script="Uigh" typeface="Microsoft Uighur"/>
         <a:font script="Geor" typeface="Sylfaen"/>
+        <a:font script="Armn" typeface="Arial"/>
+        <a:font script="Bugi" typeface="Leelawadee UI"/>
+        <a:font script="Bopo" typeface="Microsoft JhengHei"/>
+        <a:font script="Java" typeface="Javanese Text"/>
+        <a:font script="Lisu" typeface="Segoe UI"/>
+        <a:font script="Mymr" typeface="Myanmar Text"/>
+        <a:font script="Nkoo" typeface="Ebrima"/>
+        <a:font script="Olck" typeface="Nirmala UI"/>
+        <a:font script="Osma" typeface="Ebrima"/>
+        <a:font script="Phag" typeface="Phagspa"/>
+        <a:font script="Syrn" typeface="Estrangelo Edessa"/>
+        <a:font script="Syrj" typeface="Estrangelo Edessa"/>
+        <a:font script="Syre" typeface="Estrangelo Edessa"/>
+        <a:font script="Sora" typeface="Nirmala UI"/>
+        <a:font script="Tale" typeface="Microsoft Tai Le"/>
+        <a:font script="Talu" typeface="Microsoft New Tai Lue"/>
+        <a:font script="Tfng" typeface="Ebrima"/>
       </a:minorFont>
     </a:fontScheme>
     <a:fmtScheme name="Office">
@@ -17632,180 +17774,136 @@
           <a:gsLst>
             <a:gs pos="0">
               <a:schemeClr val="phClr">
-                <a:tint val="50000"/>
-                <a:satMod val="300000"/>
+                <a:lumMod val="110000"/>
+                <a:satMod val="105000"/>
+                <a:tint val="67000"/>
               </a:schemeClr>
             </a:gs>
-            <a:gs pos="35000">
+            <a:gs pos="50000">
               <a:schemeClr val="phClr">
-                <a:tint val="37000"/>
-                <a:satMod val="300000"/>
+                <a:lumMod val="105000"/>
+                <a:satMod val="103000"/>
+                <a:tint val="73000"/>
               </a:schemeClr>
             </a:gs>
             <a:gs pos="100000">
               <a:schemeClr val="phClr">
-                <a:tint val="15000"/>
-                <a:satMod val="350000"/>
+                <a:lumMod val="105000"/>
+                <a:satMod val="109000"/>
+                <a:tint val="81000"/>
               </a:schemeClr>
             </a:gs>
           </a:gsLst>
-          <a:lin ang="16200000" scaled="1"/>
+          <a:lin ang="5400000" scaled="0"/>
         </a:gradFill>
         <a:gradFill rotWithShape="1">
           <a:gsLst>
             <a:gs pos="0">
               <a:schemeClr val="phClr">
-                <a:tint val="100000"/>
+                <a:satMod val="103000"/>
+                <a:lumMod val="102000"/>
+                <a:tint val="94000"/>
+              </a:schemeClr>
+            </a:gs>
+            <a:gs pos="50000">
+              <a:schemeClr val="phClr">
+                <a:satMod val="110000"/>
+                <a:lumMod val="100000"/>
                 <a:shade val="100000"/>
-                <a:satMod val="130000"/>
               </a:schemeClr>
             </a:gs>
             <a:gs pos="100000">
               <a:schemeClr val="phClr">
-                <a:tint val="50000"/>
-                <a:shade val="100000"/>
-                <a:satMod val="350000"/>
+                <a:lumMod val="99000"/>
+                <a:satMod val="120000"/>
+                <a:shade val="78000"/>
               </a:schemeClr>
             </a:gs>
           </a:gsLst>
-          <a:lin ang="16200000" scaled="0"/>
+          <a:lin ang="5400000" scaled="0"/>
         </a:gradFill>
       </a:fillStyleLst>
       <a:lnStyleLst>
-        <a:ln w="9525" cap="flat" cmpd="sng" algn="ctr">
+        <a:ln w="12700" cap="flat" cmpd="sng" algn="ctr">
           <a:solidFill>
-            <a:schemeClr val="phClr">
-              <a:shade val="95000"/>
-              <a:satMod val="105000"/>
-            </a:schemeClr>
+            <a:schemeClr val="phClr"/>
           </a:solidFill>
           <a:prstDash val="solid"/>
+          <a:miter lim="800000"/>
+        </a:ln>
+        <a:ln w="19050" cap="flat" cmpd="sng" algn="ctr">
+          <a:solidFill>
+            <a:schemeClr val="phClr"/>
+          </a:solidFill>
+          <a:prstDash val="solid"/>
+          <a:miter lim="800000"/>
         </a:ln>
         <a:ln w="25400" cap="flat" cmpd="sng" algn="ctr">
           <a:solidFill>
             <a:schemeClr val="phClr"/>
           </a:solidFill>
           <a:prstDash val="solid"/>
-        </a:ln>
-        <a:ln w="38100" cap="flat" cmpd="sng" algn="ctr">
-          <a:solidFill>
-            <a:schemeClr val="phClr"/>
-          </a:solidFill>
-          <a:prstDash val="solid"/>
+          <a:miter lim="800000"/>
         </a:ln>
       </a:lnStyleLst>
       <a:effectStyleLst>
         <a:effectStyle>
+          <a:effectLst/>
+        </a:effectStyle>
+        <a:effectStyle>
+          <a:effectLst/>
+        </a:effectStyle>
+        <a:effectStyle>
           <a:effectLst>
-            <a:outerShdw blurRad="40000" dist="20000" dir="5400000" rotWithShape="0">
+            <a:outerShdw blurRad="57150" dist="19050" dir="5400000" algn="ctr" rotWithShape="0">
               <a:srgbClr val="000000">
-                <a:alpha val="38000"/>
+                <a:alpha val="63000"/>
               </a:srgbClr>
             </a:outerShdw>
           </a:effectLst>
-        </a:effectStyle>
-        <a:effectStyle>
-          <a:effectLst>
-            <a:outerShdw blurRad="40000" dist="23000" dir="5400000" rotWithShape="0">
-              <a:srgbClr val="000000">
-                <a:alpha val="35000"/>
-              </a:srgbClr>
-            </a:outerShdw>
-          </a:effectLst>
-        </a:effectStyle>
-        <a:effectStyle>
-          <a:effectLst>
-            <a:outerShdw blurRad="40000" dist="23000" dir="5400000" rotWithShape="0">
-              <a:srgbClr val="000000">
-                <a:alpha val="35000"/>
-              </a:srgbClr>
-            </a:outerShdw>
-          </a:effectLst>
-          <a:scene3d>
-            <a:camera prst="orthographicFront">
-              <a:rot lat="0" lon="0" rev="0"/>
-            </a:camera>
-            <a:lightRig rig="threePt" dir="t">
-              <a:rot lat="0" lon="0" rev="1200000"/>
-            </a:lightRig>
-          </a:scene3d>
-          <a:sp3d>
-            <a:bevelT w="63500" h="25400"/>
-          </a:sp3d>
         </a:effectStyle>
       </a:effectStyleLst>
       <a:bgFillStyleLst>
         <a:solidFill>
           <a:schemeClr val="phClr"/>
         </a:solidFill>
+        <a:solidFill>
+          <a:schemeClr val="phClr">
+            <a:tint val="95000"/>
+            <a:satMod val="170000"/>
+          </a:schemeClr>
+        </a:solidFill>
         <a:gradFill rotWithShape="1">
           <a:gsLst>
             <a:gs pos="0">
               <a:schemeClr val="phClr">
-                <a:tint val="40000"/>
-                <a:satMod val="350000"/>
+                <a:tint val="93000"/>
+                <a:satMod val="150000"/>
+                <a:shade val="98000"/>
+                <a:lumMod val="102000"/>
               </a:schemeClr>
             </a:gs>
-            <a:gs pos="40000">
+            <a:gs pos="50000">
               <a:schemeClr val="phClr">
-                <a:tint val="45000"/>
-                <a:shade val="99000"/>
-                <a:satMod val="350000"/>
+                <a:tint val="98000"/>
+                <a:satMod val="130000"/>
+                <a:shade val="90000"/>
+                <a:lumMod val="103000"/>
               </a:schemeClr>
             </a:gs>
             <a:gs pos="100000">
               <a:schemeClr val="phClr">
-                <a:shade val="20000"/>
-                <a:satMod val="255000"/>
+                <a:shade val="63000"/>
+                <a:satMod val="120000"/>
               </a:schemeClr>
             </a:gs>
           </a:gsLst>
-          <a:path path="circle">
-            <a:fillToRect l="50000" t="-80000" r="50000" b="180000"/>
-          </a:path>
-        </a:gradFill>
-        <a:gradFill rotWithShape="1">
-          <a:gsLst>
-            <a:gs pos="0">
-              <a:schemeClr val="phClr">
-                <a:tint val="80000"/>
-                <a:satMod val="300000"/>
-              </a:schemeClr>
-            </a:gs>
-            <a:gs pos="100000">
-              <a:schemeClr val="phClr">
-                <a:shade val="30000"/>
-                <a:satMod val="200000"/>
-              </a:schemeClr>
-            </a:gs>
-          </a:gsLst>
-          <a:path path="circle">
-            <a:fillToRect l="50000" t="50000" r="50000" b="50000"/>
-          </a:path>
+          <a:lin ang="5400000" scaled="0"/>
         </a:gradFill>
       </a:bgFillStyleLst>
     </a:fmtScheme>
   </a:themeElements>
   <a:objectDefaults>
-    <a:spDef>
-      <a:spPr/>
-      <a:bodyPr/>
-      <a:lstStyle/>
-      <a:style>
-        <a:lnRef idx="1">
-          <a:schemeClr val="accent1"/>
-        </a:lnRef>
-        <a:fillRef idx="3">
-          <a:schemeClr val="accent1"/>
-        </a:fillRef>
-        <a:effectRef idx="2">
-          <a:schemeClr val="accent1"/>
-        </a:effectRef>
-        <a:fontRef idx="minor">
-          <a:schemeClr val="lt1"/>
-        </a:fontRef>
-      </a:style>
-    </a:spDef>
     <a:lnDef>
       <a:spPr/>
       <a:bodyPr/>
@@ -17827,5 +17925,10 @@
     </a:lnDef>
   </a:objectDefaults>
   <a:extraClrSchemeLst/>
+  <a:extLst>
+    <a:ext uri="{05A4C25C-085E-4340-85A3-A5531E510DB2}">
+      <thm15:themeFamily xmlns:thm15="http://schemas.microsoft.com/office/thememl/2012/main" name="Office Theme" id="{2E142A2C-CD16-42D6-873A-C26D2A0506FA}" vid="{1BDDFF52-6CD6-40A5-AB3C-68EB2F1E4D0A}"/>
+    </a:ext>
+  </a:extLst>
 </a:theme>
 </file>